--- a/artifacts/speaking-portfolio-expanded/decks/free-tier-15min-screen.pptx
+++ b/artifacts/speaking-portfolio-expanded/decks/free-tier-15min-screen.pptx
@@ -100,53 +100,53 @@
                 <a:ea typeface="Arial"/>
                 <a:cs typeface="Arial"/>
               </a:rPr>
-              <a:t xml:space="preserve">Cry Me a Free Tier</a:t>
-            </a:r>
-            <a:endParaRPr lang="en-US" sz="1200"/>
-          </a:p>
-          <a:p>
-            <a:pPr marL="0" indent="0">
-              <a:lnSpc>
-                <a:spcPts val="1560"/>
-              </a:lnSpc>
-              <a:spcAft>
-                <a:spcPts val="0"/>
-              </a:spcAft>
-              <a:buNone/>
-            </a:pPr>
-            <a:r>
-              <a:rPr lang="en-US" sz="1200" b="0">
-                <a:solidFill>
-                  <a:srgbClr val="202b33"/>
-                </a:solidFill>
-                <a:latin typeface="Arial"/>
-                <a:ea typeface="Arial"/>
-                <a:cs typeface="Arial"/>
-              </a:rPr>
-              <a:t xml:space="preserve"/>
-            </a:r>
-            <a:endParaRPr lang="en-US" sz="1200"/>
-          </a:p>
-          <a:p>
-            <a:pPr marL="0" indent="0">
-              <a:lnSpc>
-                <a:spcPts val="1560"/>
-              </a:lnSpc>
-              <a:spcAft>
-                <a:spcPts val="0"/>
-              </a:spcAft>
-              <a:buNone/>
-            </a:pPr>
-            <a:r>
-              <a:rPr lang="en-US" sz="1200" b="0">
-                <a:solidFill>
-                  <a:srgbClr val="202b33"/>
-                </a:solidFill>
-                <a:latin typeface="Arial"/>
-                <a:ea typeface="Arial"/>
-                <a:cs typeface="Arial"/>
-              </a:rPr>
-              <a:t xml:space="preserve">Source slide 1. 00:00 to 01:30</a:t>
+              <a:t xml:space="preserve">Buy Me a Free Tier</a:t>
+            </a:r>
+            <a:endParaRPr lang="en-US" sz="1200"/>
+          </a:p>
+          <a:p>
+            <a:pPr marL="0" indent="0">
+              <a:lnSpc>
+                <a:spcPts val="1560"/>
+              </a:lnSpc>
+              <a:spcAft>
+                <a:spcPts val="0"/>
+              </a:spcAft>
+              <a:buNone/>
+            </a:pPr>
+            <a:r>
+              <a:rPr lang="en-US" sz="1200" b="0">
+                <a:solidFill>
+                  <a:srgbClr val="202b33"/>
+                </a:solidFill>
+                <a:latin typeface="Arial"/>
+                <a:ea typeface="Arial"/>
+                <a:cs typeface="Arial"/>
+              </a:rPr>
+              <a:t xml:space="preserve"/>
+            </a:r>
+            <a:endParaRPr lang="en-US" sz="1200"/>
+          </a:p>
+          <a:p>
+            <a:pPr marL="0" indent="0">
+              <a:lnSpc>
+                <a:spcPts val="1560"/>
+              </a:lnSpc>
+              <a:spcAft>
+                <a:spcPts val="0"/>
+              </a:spcAft>
+              <a:buNone/>
+            </a:pPr>
+            <a:r>
+              <a:rPr lang="en-US" sz="1200" b="0">
+                <a:solidFill>
+                  <a:srgbClr val="202b33"/>
+                </a:solidFill>
+                <a:latin typeface="Arial"/>
+                <a:ea typeface="Arial"/>
+                <a:cs typeface="Arial"/>
+              </a:rPr>
+              <a:t xml:space="preserve">Source slide 1. 00:00 to 01:45</a:t>
             </a:r>
             <a:endParaRPr lang="en-US" sz="1200"/>
           </a:p>
@@ -376,6 +376,52 @@
                 <a:ea typeface="Arial"/>
                 <a:cs typeface="Arial"/>
               </a:rPr>
+              <a:t xml:space="preserve">That is what you are getting today. Eight words. Engineers lose this argument in budget meetings because the best we can say is "it feels wasteful," and finance says "the bill looks fine." These eight words are how you say it so it lands.</a:t>
+            </a:r>
+            <a:endParaRPr lang="en-US" sz="1200"/>
+          </a:p>
+          <a:p>
+            <a:pPr marL="0" indent="0">
+              <a:lnSpc>
+                <a:spcPts val="1560"/>
+              </a:lnSpc>
+              <a:spcAft>
+                <a:spcPts val="0"/>
+              </a:spcAft>
+              <a:buNone/>
+            </a:pPr>
+            <a:r>
+              <a:rPr lang="en-US" sz="1200" b="0">
+                <a:solidFill>
+                  <a:srgbClr val="202b33"/>
+                </a:solidFill>
+                <a:latin typeface="Arial"/>
+                <a:ea typeface="Arial"/>
+                <a:cs typeface="Arial"/>
+              </a:rPr>
+              <a:t xml:space="preserve"/>
+            </a:r>
+            <a:endParaRPr lang="en-US" sz="1200"/>
+          </a:p>
+          <a:p>
+            <a:pPr marL="0" indent="0">
+              <a:lnSpc>
+                <a:spcPts val="1560"/>
+              </a:lnSpc>
+              <a:spcAft>
+                <a:spcPts val="0"/>
+              </a:spcAft>
+              <a:buNone/>
+            </a:pPr>
+            <a:r>
+              <a:rPr lang="en-US" sz="1200" b="0">
+                <a:solidFill>
+                  <a:srgbClr val="202b33"/>
+                </a:solidFill>
+                <a:latin typeface="Arial"/>
+                <a:ea typeface="Arial"/>
+                <a:cs typeface="Arial"/>
+              </a:rPr>
               <a:t xml:space="preserve">The first time a bill, a quota, or a rate change broke an assumption in something you built.</a:t>
             </a:r>
             <a:endParaRPr lang="en-US" sz="1200"/>
@@ -468,7 +514,7 @@
                 <a:ea typeface="Arial"/>
                 <a:cs typeface="Arial"/>
               </a:rPr>
-              <a:t xml:space="preserve">Bridge: price, cost and value are three different numbers, and the gap between what you pay and what it is worth to you is why nobody is measuring.</a:t>
+              <a:t xml:space="preserve">Bridge: four boxes on one invoice - price paid, resources consumed, cost allocated, value delivered - and the gap between the last two is why nobody is measuring.</a:t>
             </a:r>
             <a:endParaRPr lang="en-US" sz="1200"/>
           </a:p>
@@ -535,53 +581,53 @@
                 <a:ea typeface="Arial"/>
                 <a:cs typeface="Arial"/>
               </a:rPr>
-              <a:t xml:space="preserve">Cry Me a Free Tier</a:t>
-            </a:r>
-            <a:endParaRPr lang="en-US" sz="1200"/>
-          </a:p>
-          <a:p>
-            <a:pPr marL="0" indent="0">
-              <a:lnSpc>
-                <a:spcPts val="1560"/>
-              </a:lnSpc>
-              <a:spcAft>
-                <a:spcPts val="0"/>
-              </a:spcAft>
-              <a:buNone/>
-            </a:pPr>
-            <a:r>
-              <a:rPr lang="en-US" sz="1200" b="0">
-                <a:solidFill>
-                  <a:srgbClr val="202b33"/>
-                </a:solidFill>
-                <a:latin typeface="Arial"/>
-                <a:ea typeface="Arial"/>
-                <a:cs typeface="Arial"/>
-              </a:rPr>
-              <a:t xml:space="preserve"/>
-            </a:r>
-            <a:endParaRPr lang="en-US" sz="1200"/>
-          </a:p>
-          <a:p>
-            <a:pPr marL="0" indent="0">
-              <a:lnSpc>
-                <a:spcPts val="1560"/>
-              </a:lnSpc>
-              <a:spcAft>
-                <a:spcPts val="0"/>
-              </a:spcAft>
-              <a:buNone/>
-            </a:pPr>
-            <a:r>
-              <a:rPr lang="en-US" sz="1200" b="0">
-                <a:solidFill>
-                  <a:srgbClr val="202b33"/>
-                </a:solidFill>
-                <a:latin typeface="Arial"/>
-                <a:ea typeface="Arial"/>
-                <a:cs typeface="Arial"/>
-              </a:rPr>
-              <a:t xml:space="preserve">Source slide 3. 01:30 to 03:30</a:t>
+              <a:t xml:space="preserve">Buy Me a Free Tier</a:t>
+            </a:r>
+            <a:endParaRPr lang="en-US" sz="1200"/>
+          </a:p>
+          <a:p>
+            <a:pPr marL="0" indent="0">
+              <a:lnSpc>
+                <a:spcPts val="1560"/>
+              </a:lnSpc>
+              <a:spcAft>
+                <a:spcPts val="0"/>
+              </a:spcAft>
+              <a:buNone/>
+            </a:pPr>
+            <a:r>
+              <a:rPr lang="en-US" sz="1200" b="0">
+                <a:solidFill>
+                  <a:srgbClr val="202b33"/>
+                </a:solidFill>
+                <a:latin typeface="Arial"/>
+                <a:ea typeface="Arial"/>
+                <a:cs typeface="Arial"/>
+              </a:rPr>
+              <a:t xml:space="preserve"/>
+            </a:r>
+            <a:endParaRPr lang="en-US" sz="1200"/>
+          </a:p>
+          <a:p>
+            <a:pPr marL="0" indent="0">
+              <a:lnSpc>
+                <a:spcPts val="1560"/>
+              </a:lnSpc>
+              <a:spcAft>
+                <a:spcPts val="0"/>
+              </a:spcAft>
+              <a:buNone/>
+            </a:pPr>
+            <a:r>
+              <a:rPr lang="en-US" sz="1200" b="0">
+                <a:solidFill>
+                  <a:srgbClr val="202b33"/>
+                </a:solidFill>
+                <a:latin typeface="Arial"/>
+                <a:ea typeface="Arial"/>
+                <a:cs typeface="Arial"/>
+              </a:rPr>
+              <a:t xml:space="preserve">Source slide 3. 01:45 to 03:45</a:t>
             </a:r>
             <a:endParaRPr lang="en-US" sz="1200"/>
           </a:p>
@@ -719,7 +765,7 @@
                 <a:ea typeface="Arial"/>
                 <a:cs typeface="Arial"/>
               </a:rPr>
-              <a:t xml:space="preserve">There are four respectable explanations for a low price, and an engineer arguing about this in a meeting should be able to name all four.</a:t>
+              <a:t xml:space="preserve">Penetration pricing: buy the market now, raise later. Standard, legal, taught in every business school. Loss leader in a bundle: the cheap thing funds the expensive thing next to it, which is what a two-sided market does for a living. Predation: below cost specifically to remove rivals. In US law that is not a vibe, it is a test. Brooke Group, 1993: you need below-cost pricing and a dangerous probability of recoupment. And the fourth explanation, the one that keeps me honest: it is genuinely cheap, and getting cheaper, because the engineering is real.</a:t>
             </a:r>
             <a:endParaRPr lang="en-US" sz="1200"/>
           </a:p>
@@ -1062,53 +1108,53 @@
                 <a:ea typeface="Arial"/>
                 <a:cs typeface="Arial"/>
               </a:rPr>
-              <a:t xml:space="preserve">Cry Me a Free Tier</a:t>
-            </a:r>
-            <a:endParaRPr lang="en-US" sz="1200"/>
-          </a:p>
-          <a:p>
-            <a:pPr marL="0" indent="0">
-              <a:lnSpc>
-                <a:spcPts val="1560"/>
-              </a:lnSpc>
-              <a:spcAft>
-                <a:spcPts val="0"/>
-              </a:spcAft>
-              <a:buNone/>
-            </a:pPr>
-            <a:r>
-              <a:rPr lang="en-US" sz="1200" b="0">
-                <a:solidFill>
-                  <a:srgbClr val="202b33"/>
-                </a:solidFill>
-                <a:latin typeface="Arial"/>
-                <a:ea typeface="Arial"/>
-                <a:cs typeface="Arial"/>
-              </a:rPr>
-              <a:t xml:space="preserve"/>
-            </a:r>
-            <a:endParaRPr lang="en-US" sz="1200"/>
-          </a:p>
-          <a:p>
-            <a:pPr marL="0" indent="0">
-              <a:lnSpc>
-                <a:spcPts val="1560"/>
-              </a:lnSpc>
-              <a:spcAft>
-                <a:spcPts val="0"/>
-              </a:spcAft>
-              <a:buNone/>
-            </a:pPr>
-            <a:r>
-              <a:rPr lang="en-US" sz="1200" b="0">
-                <a:solidFill>
-                  <a:srgbClr val="202b33"/>
-                </a:solidFill>
-                <a:latin typeface="Arial"/>
-                <a:ea typeface="Arial"/>
-                <a:cs typeface="Arial"/>
-              </a:rPr>
-              <a:t xml:space="preserve">Source slide 5. 03:30 to 05:00</a:t>
+              <a:t xml:space="preserve">Buy Me a Free Tier</a:t>
+            </a:r>
+            <a:endParaRPr lang="en-US" sz="1200"/>
+          </a:p>
+          <a:p>
+            <a:pPr marL="0" indent="0">
+              <a:lnSpc>
+                <a:spcPts val="1560"/>
+              </a:lnSpc>
+              <a:spcAft>
+                <a:spcPts val="0"/>
+              </a:spcAft>
+              <a:buNone/>
+            </a:pPr>
+            <a:r>
+              <a:rPr lang="en-US" sz="1200" b="0">
+                <a:solidFill>
+                  <a:srgbClr val="202b33"/>
+                </a:solidFill>
+                <a:latin typeface="Arial"/>
+                <a:ea typeface="Arial"/>
+                <a:cs typeface="Arial"/>
+              </a:rPr>
+              <a:t xml:space="preserve"/>
+            </a:r>
+            <a:endParaRPr lang="en-US" sz="1200"/>
+          </a:p>
+          <a:p>
+            <a:pPr marL="0" indent="0">
+              <a:lnSpc>
+                <a:spcPts val="1560"/>
+              </a:lnSpc>
+              <a:spcAft>
+                <a:spcPts val="0"/>
+              </a:spcAft>
+              <a:buNone/>
+            </a:pPr>
+            <a:r>
+              <a:rPr lang="en-US" sz="1200" b="0">
+                <a:solidFill>
+                  <a:srgbClr val="202b33"/>
+                </a:solidFill>
+                <a:latin typeface="Arial"/>
+                <a:ea typeface="Arial"/>
+                <a:cs typeface="Arial"/>
+              </a:rPr>
+              <a:t xml:space="preserve">Source slide 5. 03:45 to 05:15</a:t>
             </a:r>
             <a:endParaRPr lang="en-US" sz="1200"/>
           </a:p>
@@ -1589,53 +1635,53 @@
                 <a:ea typeface="Arial"/>
                 <a:cs typeface="Arial"/>
               </a:rPr>
-              <a:t xml:space="preserve">Cry Me a Free Tier</a:t>
-            </a:r>
-            <a:endParaRPr lang="en-US" sz="1200"/>
-          </a:p>
-          <a:p>
-            <a:pPr marL="0" indent="0">
-              <a:lnSpc>
-                <a:spcPts val="1560"/>
-              </a:lnSpc>
-              <a:spcAft>
-                <a:spcPts val="0"/>
-              </a:spcAft>
-              <a:buNone/>
-            </a:pPr>
-            <a:r>
-              <a:rPr lang="en-US" sz="1200" b="0">
-                <a:solidFill>
-                  <a:srgbClr val="202b33"/>
-                </a:solidFill>
-                <a:latin typeface="Arial"/>
-                <a:ea typeface="Arial"/>
-                <a:cs typeface="Arial"/>
-              </a:rPr>
-              <a:t xml:space="preserve"/>
-            </a:r>
-            <a:endParaRPr lang="en-US" sz="1200"/>
-          </a:p>
-          <a:p>
-            <a:pPr marL="0" indent="0">
-              <a:lnSpc>
-                <a:spcPts val="1560"/>
-              </a:lnSpc>
-              <a:spcAft>
-                <a:spcPts val="0"/>
-              </a:spcAft>
-              <a:buNone/>
-            </a:pPr>
-            <a:r>
-              <a:rPr lang="en-US" sz="1200" b="0">
-                <a:solidFill>
-                  <a:srgbClr val="202b33"/>
-                </a:solidFill>
-                <a:latin typeface="Arial"/>
-                <a:ea typeface="Arial"/>
-                <a:cs typeface="Arial"/>
-              </a:rPr>
-              <a:t xml:space="preserve">Source slide 6. 05:00 to 07:00</a:t>
+              <a:t xml:space="preserve">Buy Me a Free Tier</a:t>
+            </a:r>
+            <a:endParaRPr lang="en-US" sz="1200"/>
+          </a:p>
+          <a:p>
+            <a:pPr marL="0" indent="0">
+              <a:lnSpc>
+                <a:spcPts val="1560"/>
+              </a:lnSpc>
+              <a:spcAft>
+                <a:spcPts val="0"/>
+              </a:spcAft>
+              <a:buNone/>
+            </a:pPr>
+            <a:r>
+              <a:rPr lang="en-US" sz="1200" b="0">
+                <a:solidFill>
+                  <a:srgbClr val="202b33"/>
+                </a:solidFill>
+                <a:latin typeface="Arial"/>
+                <a:ea typeface="Arial"/>
+                <a:cs typeface="Arial"/>
+              </a:rPr>
+              <a:t xml:space="preserve"/>
+            </a:r>
+            <a:endParaRPr lang="en-US" sz="1200"/>
+          </a:p>
+          <a:p>
+            <a:pPr marL="0" indent="0">
+              <a:lnSpc>
+                <a:spcPts val="1560"/>
+              </a:lnSpc>
+              <a:spcAft>
+                <a:spcPts val="0"/>
+              </a:spcAft>
+              <a:buNone/>
+            </a:pPr>
+            <a:r>
+              <a:rPr lang="en-US" sz="1200" b="0">
+                <a:solidFill>
+                  <a:srgbClr val="202b33"/>
+                </a:solidFill>
+                <a:latin typeface="Arial"/>
+                <a:ea typeface="Arial"/>
+                <a:cs typeface="Arial"/>
+              </a:rPr>
+              <a:t xml:space="preserve">Source slide 6. 05:15 to 07:15</a:t>
             </a:r>
             <a:endParaRPr lang="en-US" sz="1200"/>
           </a:p>
@@ -1911,7 +1957,7 @@
                 <a:ea typeface="Arial"/>
                 <a:cs typeface="Arial"/>
               </a:rPr>
-              <a:t xml:space="preserve">Both things can be fine. A falling price and a growing bill coexist comfortably as long as customer value grows faster. That is the relationship to measure, and almost nobody measures it.</a:t>
+              <a:t xml:space="preserve">So: your per-token price has fallen off a cliff over the last few years, and your bill went up. Everyone in this room has had that conversation with a CFO and lost it. You are not being gouged and you did not do anything wrong. Spend is price times consumption, and consumption is jobs times calls per job times tokens per call. Cheapness moved every term on the right. Epoch's data through 2025 shows the price of a fixed capability falling fast and very unevenly by task, which is real and worth knowing, and is also exactly the condition under which total spend rises.</a:t>
             </a:r>
             <a:endParaRPr lang="en-US" sz="1200"/>
           </a:p>
@@ -2208,53 +2254,53 @@
                 <a:ea typeface="Arial"/>
                 <a:cs typeface="Arial"/>
               </a:rPr>
-              <a:t xml:space="preserve">Cry Me a Free Tier</a:t>
-            </a:r>
-            <a:endParaRPr lang="en-US" sz="1200"/>
-          </a:p>
-          <a:p>
-            <a:pPr marL="0" indent="0">
-              <a:lnSpc>
-                <a:spcPts val="1560"/>
-              </a:lnSpc>
-              <a:spcAft>
-                <a:spcPts val="0"/>
-              </a:spcAft>
-              <a:buNone/>
-            </a:pPr>
-            <a:r>
-              <a:rPr lang="en-US" sz="1200" b="0">
-                <a:solidFill>
-                  <a:srgbClr val="202b33"/>
-                </a:solidFill>
-                <a:latin typeface="Arial"/>
-                <a:ea typeface="Arial"/>
-                <a:cs typeface="Arial"/>
-              </a:rPr>
-              <a:t xml:space="preserve"/>
-            </a:r>
-            <a:endParaRPr lang="en-US" sz="1200"/>
-          </a:p>
-          <a:p>
-            <a:pPr marL="0" indent="0">
-              <a:lnSpc>
-                <a:spcPts val="1560"/>
-              </a:lnSpc>
-              <a:spcAft>
-                <a:spcPts val="0"/>
-              </a:spcAft>
-              <a:buNone/>
-            </a:pPr>
-            <a:r>
-              <a:rPr lang="en-US" sz="1200" b="0">
-                <a:solidFill>
-                  <a:srgbClr val="202b33"/>
-                </a:solidFill>
-                <a:latin typeface="Arial"/>
-                <a:ea typeface="Arial"/>
-                <a:cs typeface="Arial"/>
-              </a:rPr>
-              <a:t xml:space="preserve">Source slide 7. 07:00 to 09:30</a:t>
+              <a:t xml:space="preserve">Buy Me a Free Tier</a:t>
+            </a:r>
+            <a:endParaRPr lang="en-US" sz="1200"/>
+          </a:p>
+          <a:p>
+            <a:pPr marL="0" indent="0">
+              <a:lnSpc>
+                <a:spcPts val="1560"/>
+              </a:lnSpc>
+              <a:spcAft>
+                <a:spcPts val="0"/>
+              </a:spcAft>
+              <a:buNone/>
+            </a:pPr>
+            <a:r>
+              <a:rPr lang="en-US" sz="1200" b="0">
+                <a:solidFill>
+                  <a:srgbClr val="202b33"/>
+                </a:solidFill>
+                <a:latin typeface="Arial"/>
+                <a:ea typeface="Arial"/>
+                <a:cs typeface="Arial"/>
+              </a:rPr>
+              <a:t xml:space="preserve"/>
+            </a:r>
+            <a:endParaRPr lang="en-US" sz="1200"/>
+          </a:p>
+          <a:p>
+            <a:pPr marL="0" indent="0">
+              <a:lnSpc>
+                <a:spcPts val="1560"/>
+              </a:lnSpc>
+              <a:spcAft>
+                <a:spcPts val="0"/>
+              </a:spcAft>
+              <a:buNone/>
+            </a:pPr>
+            <a:r>
+              <a:rPr lang="en-US" sz="1200" b="0">
+                <a:solidFill>
+                  <a:srgbClr val="202b33"/>
+                </a:solidFill>
+                <a:latin typeface="Arial"/>
+                <a:ea typeface="Arial"/>
+                <a:cs typeface="Arial"/>
+              </a:rPr>
+              <a:t xml:space="preserve">Source slide 7. 07:15 to 09:30</a:t>
             </a:r>
             <a:endParaRPr lang="en-US" sz="1200"/>
           </a:p>
@@ -2735,7 +2781,7 @@
                 <a:ea typeface="Arial"/>
                 <a:cs typeface="Arial"/>
               </a:rPr>
-              <a:t xml:space="preserve">Cry Me a Free Tier</a:t>
+              <a:t xml:space="preserve">Buy Me a Free Tier</a:t>
             </a:r>
             <a:endParaRPr lang="en-US" sz="1200"/>
           </a:p>
@@ -3216,7 +3262,7 @@
                 <a:ea typeface="Arial"/>
                 <a:cs typeface="Arial"/>
               </a:rPr>
-              <a:t xml:space="preserve">Cry Me a Free Tier</a:t>
+              <a:t xml:space="preserve">Buy Me a Free Tier</a:t>
             </a:r>
             <a:endParaRPr lang="en-US" sz="1200"/>
           </a:p>
@@ -3538,7 +3584,7 @@
                 <a:ea typeface="Arial"/>
                 <a:cs typeface="Arial"/>
               </a:rPr>
-              <a:t xml:space="preserve">So stop thinking of this as shopping, where the customer holds the power because they can leave. You are contracting, with a much better capitalized counterparty, and your architecture is the collateral. That reframe is the whole talk, and everything on the next three slides is just a way of reducing specificity or pricing the exposure.</a:t>
+              <a:t xml:space="preserve">So stop thinking of this as shopping, where the customer holds the power because they can leave. You are contracting, with a much better capitalized counterparty, and your architecture is the collateral. That reframe is the whole talk, and everything after this is just a way of reducing specificity or pricing the exposure.</a:t>
             </a:r>
             <a:endParaRPr lang="en-US" sz="1200"/>
           </a:p>
@@ -3743,7 +3789,7 @@
                 <a:ea typeface="Arial"/>
                 <a:cs typeface="Arial"/>
               </a:rPr>
-              <a:t xml:space="preserve">Cry Me a Free Tier</a:t>
+              <a:t xml:space="preserve">Buy Me a Free Tier</a:t>
             </a:r>
             <a:endParaRPr lang="en-US" sz="1200"/>
           </a:p>
@@ -4111,99 +4157,99 @@
                 <a:ea typeface="Arial"/>
                 <a:cs typeface="Arial"/>
               </a:rPr>
-              <a:t xml:space="preserve">Cheap intelligence changes incentives before it changes organizations. Leave the table up.</a:t>
-            </a:r>
-            <a:endParaRPr lang="en-US" sz="1200"/>
-          </a:p>
-          <a:p>
-            <a:pPr marL="0" indent="0">
-              <a:lnSpc>
-                <a:spcPts val="1560"/>
-              </a:lnSpc>
-              <a:spcAft>
-                <a:spcPts val="0"/>
-              </a:spcAft>
-              <a:buNone/>
-            </a:pPr>
-            <a:r>
-              <a:rPr lang="en-US" sz="1200" b="0">
-                <a:solidFill>
-                  <a:srgbClr val="202b33"/>
-                </a:solidFill>
-                <a:latin typeface="Arial"/>
-                <a:ea typeface="Arial"/>
-                <a:cs typeface="Arial"/>
-              </a:rPr>
-              <a:t xml:space="preserve"/>
-            </a:r>
-            <a:endParaRPr lang="en-US" sz="1200"/>
-          </a:p>
-          <a:p>
-            <a:pPr marL="0" indent="0">
-              <a:lnSpc>
-                <a:spcPts val="1560"/>
-              </a:lnSpc>
-              <a:spcAft>
-                <a:spcPts val="0"/>
-              </a:spcAft>
-              <a:buNone/>
-            </a:pPr>
-            <a:r>
-              <a:rPr lang="en-US" sz="1200" b="0">
-                <a:solidFill>
-                  <a:srgbClr val="202b33"/>
-                </a:solidFill>
-                <a:latin typeface="Arial"/>
-                <a:ea typeface="Arial"/>
-                <a:cs typeface="Arial"/>
-              </a:rPr>
-              <a:t xml:space="preserve"/>
-            </a:r>
-            <a:endParaRPr lang="en-US" sz="1200"/>
-          </a:p>
-          <a:p>
-            <a:pPr marL="0" indent="0">
-              <a:lnSpc>
-                <a:spcPts val="1560"/>
-              </a:lnSpc>
-              <a:spcAft>
-                <a:spcPts val="0"/>
-              </a:spcAft>
-              <a:buNone/>
-            </a:pPr>
-            <a:r>
-              <a:rPr lang="en-US" sz="1200" b="0">
-                <a:solidFill>
-                  <a:srgbClr val="202b33"/>
-                </a:solidFill>
-                <a:latin typeface="Arial"/>
-                <a:ea typeface="Arial"/>
-                <a:cs typeface="Arial"/>
-              </a:rPr>
-              <a:t xml:space="preserve"/>
-            </a:r>
-            <a:endParaRPr lang="en-US" sz="1200"/>
-          </a:p>
-          <a:p>
-            <a:pPr marL="0" indent="0">
-              <a:lnSpc>
-                <a:spcPts val="1560"/>
-              </a:lnSpc>
-              <a:spcAft>
-                <a:spcPts val="0"/>
-              </a:spcAft>
-              <a:buNone/>
-            </a:pPr>
-            <a:r>
-              <a:rPr lang="en-US" sz="1200" b="0">
-                <a:solidFill>
-                  <a:srgbClr val="202b33"/>
-                </a:solidFill>
-                <a:latin typeface="Arial"/>
-                <a:ea typeface="Arial"/>
-                <a:cs typeface="Arial"/>
-              </a:rPr>
-              <a:t xml:space="preserve">Say the last line slowly. Leave the sweep table on screen for questions.</a:t>
+              <a:t xml:space="preserve">Cheap intelligence changes incentives before it changes organizations.</a:t>
+            </a:r>
+            <a:endParaRPr lang="en-US" sz="1200"/>
+          </a:p>
+          <a:p>
+            <a:pPr marL="0" indent="0">
+              <a:lnSpc>
+                <a:spcPts val="1560"/>
+              </a:lnSpc>
+              <a:spcAft>
+                <a:spcPts val="0"/>
+              </a:spcAft>
+              <a:buNone/>
+            </a:pPr>
+            <a:r>
+              <a:rPr lang="en-US" sz="1200" b="0">
+                <a:solidFill>
+                  <a:srgbClr val="202b33"/>
+                </a:solidFill>
+                <a:latin typeface="Arial"/>
+                <a:ea typeface="Arial"/>
+                <a:cs typeface="Arial"/>
+              </a:rPr>
+              <a:t xml:space="preserve"/>
+            </a:r>
+            <a:endParaRPr lang="en-US" sz="1200"/>
+          </a:p>
+          <a:p>
+            <a:pPr marL="0" indent="0">
+              <a:lnSpc>
+                <a:spcPts val="1560"/>
+              </a:lnSpc>
+              <a:spcAft>
+                <a:spcPts val="0"/>
+              </a:spcAft>
+              <a:buNone/>
+            </a:pPr>
+            <a:r>
+              <a:rPr lang="en-US" sz="1200" b="0">
+                <a:solidFill>
+                  <a:srgbClr val="202b33"/>
+                </a:solidFill>
+                <a:latin typeface="Arial"/>
+                <a:ea typeface="Arial"/>
+                <a:cs typeface="Arial"/>
+              </a:rPr>
+              <a:t xml:space="preserve"/>
+            </a:r>
+            <a:endParaRPr lang="en-US" sz="1200"/>
+          </a:p>
+          <a:p>
+            <a:pPr marL="0" indent="0">
+              <a:lnSpc>
+                <a:spcPts val="1560"/>
+              </a:lnSpc>
+              <a:spcAft>
+                <a:spcPts val="0"/>
+              </a:spcAft>
+              <a:buNone/>
+            </a:pPr>
+            <a:r>
+              <a:rPr lang="en-US" sz="1200" b="0">
+                <a:solidFill>
+                  <a:srgbClr val="202b33"/>
+                </a:solidFill>
+                <a:latin typeface="Arial"/>
+                <a:ea typeface="Arial"/>
+                <a:cs typeface="Arial"/>
+              </a:rPr>
+              <a:t xml:space="preserve"/>
+            </a:r>
+            <a:endParaRPr lang="en-US" sz="1200"/>
+          </a:p>
+          <a:p>
+            <a:pPr marL="0" indent="0">
+              <a:lnSpc>
+                <a:spcPts val="1560"/>
+              </a:lnSpc>
+              <a:spcAft>
+                <a:spcPts val="0"/>
+              </a:spcAft>
+              <a:buNone/>
+            </a:pPr>
+            <a:r>
+              <a:rPr lang="en-US" sz="1200" b="0">
+                <a:solidFill>
+                  <a:srgbClr val="202b33"/>
+                </a:solidFill>
+                <a:latin typeface="Arial"/>
+                <a:ea typeface="Arial"/>
+                <a:cs typeface="Arial"/>
+              </a:rPr>
+              <a:t xml:space="preserve">Say the last line slowly, then stop talking. For questions, jump back to the sweep table if this route kept slide 11.</a:t>
             </a:r>
             <a:endParaRPr lang="en-US" sz="1200"/>
           </a:p>
@@ -4387,7 +4433,7 @@
                 <a:ea typeface="Arial"/>
                 <a:cs typeface="Arial"/>
               </a:rPr>
-              <a:t xml:space="preserve">Cry Me a Free Tier · Dan Levy</a:t>
+              <a:t xml:space="preserve">Buy Me a Free Tier · Dan Levy</a:t>
             </a:r>
             <a:endParaRPr lang="en-US" sz="1350"/>
           </a:p>
@@ -4704,7 +4750,7 @@
                 <a:ea typeface="Arial"/>
                 <a:cs typeface="Arial"/>
               </a:rPr>
-              <a:t xml:space="preserve">Cry Me a Free Tier</a:t>
+              <a:t xml:space="preserve">Buy Me a Free Tier</a:t>
             </a:r>
             <a:endParaRPr lang="en-US" sz="975"/>
           </a:p>
@@ -5175,7 +5221,7 @@
                 <a:ea typeface="Arial"/>
                 <a:cs typeface="Arial"/>
               </a:rPr>
-              <a:t xml:space="preserve">Cry Me a Free Tier</a:t>
+              <a:t xml:space="preserve">Buy Me a Free Tier</a:t>
             </a:r>
             <a:endParaRPr lang="en-US" sz="975"/>
           </a:p>
@@ -5698,7 +5744,7 @@
                 <a:ea typeface="Arial"/>
                 <a:cs typeface="Arial"/>
               </a:rPr>
-              <a:t xml:space="preserve">Cry Me a Free Tier</a:t>
+              <a:t xml:space="preserve">Buy Me a Free Tier</a:t>
             </a:r>
             <a:endParaRPr lang="en-US" sz="975"/>
           </a:p>
@@ -6244,7 +6290,7 @@
                 <a:ea typeface="Arial"/>
                 <a:cs typeface="Arial"/>
               </a:rPr>
-              <a:t xml:space="preserve">Cry Me a Free Tier</a:t>
+              <a:t xml:space="preserve">Buy Me a Free Tier</a:t>
             </a:r>
             <a:endParaRPr lang="en-US" sz="975"/>
           </a:p>
@@ -6888,7 +6934,7 @@
                 <a:ea typeface="Arial"/>
                 <a:cs typeface="Arial"/>
               </a:rPr>
-              <a:t xml:space="preserve">Cry Me a Free Tier</a:t>
+              <a:t xml:space="preserve">Buy Me a Free Tier</a:t>
             </a:r>
             <a:endParaRPr lang="en-US" sz="975"/>
           </a:p>
@@ -7068,7 +7114,7 @@
                 <a:ea typeface="Arial"/>
                 <a:cs typeface="Arial"/>
               </a:rPr>
-              <a:t xml:space="preserve">Your acceptance rate is a price multiplier</a:t>
+              <a:t xml:space="preserve">Doubling on a Tuesday</a:t>
             </a:r>
             <a:endParaRPr lang="en-US" sz="3900"/>
           </a:p>
@@ -7480,7 +7526,7 @@
                 <a:ea typeface="Arial"/>
                 <a:cs typeface="Arial"/>
               </a:rPr>
-              <a:t xml:space="preserve">Cry Me a Free Tier</a:t>
+              <a:t xml:space="preserve">Buy Me a Free Tier</a:t>
             </a:r>
             <a:endParaRPr lang="en-US" sz="975"/>
           </a:p>
@@ -8049,7 +8095,7 @@
                 <a:ea typeface="Arial"/>
                 <a:cs typeface="Arial"/>
               </a:rPr>
-              <a:t xml:space="preserve">Cry Me a Free Tier</a:t>
+              <a:t xml:space="preserve">Buy Me a Free Tier</a:t>
             </a:r>
             <a:endParaRPr lang="en-US" sz="975"/>
           </a:p>
@@ -8618,7 +8664,7 @@
                 <a:ea typeface="Arial"/>
                 <a:cs typeface="Arial"/>
               </a:rPr>
-              <a:t xml:space="preserve">Cry Me a Free Tier</a:t>
+              <a:t xml:space="preserve">Buy Me a Free Tier</a:t>
             </a:r>
             <a:endParaRPr lang="en-US" sz="975"/>
           </a:p>

--- a/artifacts/speaking-portfolio-expanded/decks/free-tier-15min-screen.pptx
+++ b/artifacts/speaking-portfolio-expanded/decks/free-tier-15min-screen.pptx
@@ -15,7 +15,6 @@
     <p:sldId id="260" r:id="rIdSlide5"/>
     <p:sldId id="261" r:id="rIdSlide6"/>
     <p:sldId id="262" r:id="rIdSlide7"/>
-    <p:sldId id="263" r:id="rIdSlide8"/>
   </p:sldIdLst>
   <p:sldSz cx="13716000" cy="8572500" type="custom"/>
   <p:notesSz cx="6858000" cy="9144000"/>
@@ -146,7 +145,7 @@
                 <a:ea typeface="Arial"/>
                 <a:cs typeface="Arial"/>
               </a:rPr>
-              <a:t xml:space="preserve">Source slide 1. 00:00 to 01:45</a:t>
+              <a:t xml:space="preserve">Source slide 1. 00:00 to 02:30</a:t>
             </a:r>
             <a:endParaRPr lang="en-US" sz="1200"/>
           </a:p>
@@ -627,7 +626,7 @@
                 <a:ea typeface="Arial"/>
                 <a:cs typeface="Arial"/>
               </a:rPr>
-              <a:t xml:space="preserve">Source slide 3. 01:45 to 03:45</a:t>
+              <a:t xml:space="preserve">Source slide 3. 02:30 to 05:15</a:t>
             </a:r>
             <a:endParaRPr lang="en-US" sz="1200"/>
           </a:p>
@@ -1041,7 +1040,7 @@
                 <a:ea typeface="Arial"/>
                 <a:cs typeface="Arial"/>
               </a:rPr>
-              <a:t xml:space="preserve"/>
+              <a:t xml:space="preserve">Bridge: those commitments are credible commitments in Schelling's sense, moves in a war of attrition. Note who is not a player. Somebody is buying your free tier, and it is not you. You are not a combatant, you are the terrain. And the terrain keeps its asphalt: repealing a parking minimum does not remove a lot, which is path dependence.</a:t>
             </a:r>
             <a:endParaRPr lang="en-US" sz="1200"/>
           </a:p>
@@ -1154,7 +1153,7 @@
                 <a:ea typeface="Arial"/>
                 <a:cs typeface="Arial"/>
               </a:rPr>
-              <a:t xml:space="preserve">Source slide 5. 03:45 to 05:15</a:t>
+              <a:t xml:space="preserve">Source slide 6. 05:15 to 07:15</a:t>
             </a:r>
             <a:endParaRPr lang="en-US" sz="1200"/>
           </a:p>
@@ -1200,7 +1199,7 @@
                 <a:ea typeface="Arial"/>
                 <a:cs typeface="Arial"/>
               </a:rPr>
-              <a:t xml:space="preserve">The driver sees no meter, so demand looks infinite</a:t>
+              <a:t xml:space="preserve">1865: better engines burned more coal, not less</a:t>
             </a:r>
             <a:endParaRPr lang="en-US" sz="1200"/>
           </a:p>
@@ -1246,7 +1245,7 @@
                 <a:ea typeface="Arial"/>
                 <a:cs typeface="Arial"/>
               </a:rPr>
-              <a:t xml:space="preserve">The cost moves into rents, prices, and land</a:t>
+              <a:t xml:space="preserve">Add a lane, get traffic. Elasticity near one.</a:t>
             </a:r>
             <a:endParaRPr lang="en-US" sz="1200"/>
           </a:p>
@@ -1292,7 +1291,7 @@
                 <a:ea typeface="Arial"/>
                 <a:cs typeface="Arial"/>
               </a:rPr>
-              <a:t xml:space="preserve">Word one: externality</a:t>
+              <a:t xml:space="preserve">Spend = price × jobs × calls per job × tokens per call</a:t>
             </a:r>
             <a:endParaRPr lang="en-US" sz="1200"/>
           </a:p>
@@ -1338,7 +1337,7 @@
                 <a:ea typeface="Arial"/>
                 <a:cs typeface="Arial"/>
               </a:rPr>
-              <a:t xml:space="preserve">Donald Shoup spent a career on the least glamorous subject in urban economics and was right about all of it. Cities required developers to build minimum parking. Nobody paid at the meter, so the cost went somewhere else: into rents, into retail prices, into land that became asphalt. And because drivers saw no price, demand looked infinite, so the minimums grew to match.</a:t>
+              <a:t xml:space="preserve">In 1865 William Stanley Jevons noticed something that annoyed everyone. Steam engines had gotten dramatically more efficient, and Britain was burning far more coal than before, not less. Efficiency made coal useful for more things, so people used it for more things. That is the Jevons paradox, and it is word two.</a:t>
             </a:r>
             <a:endParaRPr lang="en-US" sz="1200"/>
           </a:p>
@@ -1384,7 +1383,7 @@
                 <a:ea typeface="Arial"/>
                 <a:cs typeface="Arial"/>
               </a:rPr>
-              <a:t xml:space="preserve">That is your first word: externality. A cost that is real, and paid, but not by the person making the decision. It does not vanish. It relocates, and it usually relocates somewhere you are not looking.</a:t>
+              <a:t xml:space="preserve">The transport version is word three, induced demand. Add a lane to a congested highway and you get more traffic. Duranton and Turner measured it across US cities in 2011 and found the elasticity of driving with respect to lane-kilometres is roughly one. Build ten percent more road, get ten percent more driving. The congestion comes back.</a:t>
             </a:r>
             <a:endParaRPr lang="en-US" sz="1200"/>
           </a:p>
@@ -1430,7 +1429,7 @@
                 <a:ea typeface="Arial"/>
                 <a:cs typeface="Arial"/>
               </a:rPr>
-              <a:t xml:space="preserve">Shoup (2005, updated 2011), The High Cost of Free Parking, American Planning Association. Also Shoup (2011), [Free parking or free markets](https://www.accessmagazine.org/spring-2011/free-parking-free-markets/), ACCESS Magazine.</a:t>
+              <a:t xml:space="preserve">Jevons (1865), The Coal Question, chapter VII. Duranton and Turner (2011), The Fundamental Law of Road Congestion, American Economic Review 101(6).</a:t>
             </a:r>
             <a:endParaRPr lang="en-US" sz="1200"/>
           </a:p>
@@ -1476,6 +1475,29 @@
                 <a:ea typeface="Arial"/>
                 <a:cs typeface="Arial"/>
               </a:rPr>
+              <a:t xml:space="preserve">Cottier, Snodin, Owen, Adamczewski (Epoch AI, March 2025), [LLM inference prices have fallen rapidly but unequally across tasks](https://epoch.ai/data-insights/llm-inference-price-trends). Check for a newer edition before each delivery.</a:t>
+            </a:r>
+            <a:endParaRPr lang="en-US" sz="1200"/>
+          </a:p>
+          <a:p>
+            <a:pPr marL="0" indent="0">
+              <a:lnSpc>
+                <a:spcPts val="1560"/>
+              </a:lnSpc>
+              <a:spcAft>
+                <a:spcPts val="0"/>
+              </a:spcAft>
+              <a:buNone/>
+            </a:pPr>
+            <a:r>
+              <a:rPr lang="en-US" sz="1200" b="0">
+                <a:solidFill>
+                  <a:srgbClr val="202b33"/>
+                </a:solidFill>
+                <a:latin typeface="Arial"/>
+                <a:ea typeface="Arial"/>
+                <a:cs typeface="Arial"/>
+              </a:rPr>
               <a:t xml:space="preserve"/>
             </a:r>
             <a:endParaRPr lang="en-US" sz="1200"/>
@@ -1569,6 +1591,29 @@
                 <a:cs typeface="Arial"/>
               </a:rPr>
               <a:t xml:space="preserve"/>
+            </a:r>
+            <a:endParaRPr lang="en-US" sz="1200"/>
+          </a:p>
+          <a:p>
+            <a:pPr marL="0" indent="0">
+              <a:lnSpc>
+                <a:spcPts val="1560"/>
+              </a:lnSpc>
+              <a:spcAft>
+                <a:spcPts val="0"/>
+              </a:spcAft>
+              <a:buNone/>
+            </a:pPr>
+            <a:r>
+              <a:rPr lang="en-US" sz="1200" b="0">
+                <a:solidFill>
+                  <a:srgbClr val="202b33"/>
+                </a:solidFill>
+                <a:latin typeface="Arial"/>
+                <a:ea typeface="Arial"/>
+                <a:cs typeface="Arial"/>
+              </a:rPr>
+              <a:t xml:space="preserve">Bridge: your per-token price fell off a cliff and your bill went up, because spend is price times jobs times calls times tokens and cheapness moved every term on the right.</a:t>
             </a:r>
             <a:endParaRPr lang="en-US" sz="1200"/>
           </a:p>
@@ -1681,7 +1726,7 @@
                 <a:ea typeface="Arial"/>
                 <a:cs typeface="Arial"/>
               </a:rPr>
-              <a:t xml:space="preserve">Source slide 6. 05:15 to 07:15</a:t>
+              <a:t xml:space="preserve">Source slide 7. 07:15 to 09:30</a:t>
             </a:r>
             <a:endParaRPr lang="en-US" sz="1200"/>
           </a:p>
@@ -1727,7 +1772,7 @@
                 <a:ea typeface="Arial"/>
                 <a:cs typeface="Arial"/>
               </a:rPr>
-              <a:t xml:space="preserve">1865: better engines burned more coal, not less</a:t>
+              <a:t xml:space="preserve">Density: a frontier call where a lookup would do</a:t>
             </a:r>
             <a:endParaRPr lang="en-US" sz="1200"/>
           </a:p>
@@ -1773,7 +1818,7 @@
                 <a:ea typeface="Arial"/>
                 <a:cs typeface="Arial"/>
               </a:rPr>
-              <a:t xml:space="preserve">Add a lane, get traffic. Elasticity near one.</a:t>
+              <a:t xml:space="preserve">Business mix: products viable only at today's rate</a:t>
             </a:r>
             <a:endParaRPr lang="en-US" sz="1200"/>
           </a:p>
@@ -1819,7 +1864,7 @@
                 <a:ea typeface="Arial"/>
                 <a:cs typeface="Arial"/>
               </a:rPr>
-              <a:t xml:space="preserve">Spend = price × jobs × calls per job × tokens per call</a:t>
+              <a:t xml:space="preserve">Bundled rent: unlimited usage promised in a contract</a:t>
             </a:r>
             <a:endParaRPr lang="en-US" sz="1200"/>
           </a:p>
@@ -1865,7 +1910,7 @@
                 <a:ea typeface="Arial"/>
                 <a:cs typeface="Arial"/>
               </a:rPr>
-              <a:t xml:space="preserve">In 1865 William Stanley Jevons noticed something that annoyed everyone. Steam engines had gotten dramatically more efficient, and Britain was burning far more coal than before, not less. Efficiency made coal useful for more things, so people used it for more things. That is the Jevons paradox, and it is word two.</a:t>
+              <a:t xml:space="preserve">Small format: deterministic code loses the design review</a:t>
             </a:r>
             <a:endParaRPr lang="en-US" sz="1200"/>
           </a:p>
@@ -1911,7 +1956,7 @@
                 <a:ea typeface="Arial"/>
                 <a:cs typeface="Arial"/>
               </a:rPr>
-              <a:t xml:space="preserve">The transport version is word three, induced demand. Add a lane to a congested highway and you get more traffic. Duranton and Turner measured it across US cities in 2011 and found the elasticity of driving with respect to lane-kilometres is roughly one. Build ten percent more road, get ten percent more driving. The congestion comes back.</a:t>
+              <a:t xml:space="preserve">Walk the same chain through your stack. Density: a frontier call where a cache, a regex, or a dictionary lookup would have done, because the call looked free. Longer context, more retries, more competing branches, frontier by default. Business mix: products whose unit economics only work at promotional rates, crowding out products that would have worked at any price. Bundled rent: unlimited-usage promises to customers, baked into a contract, priced against an input you do not control. And the small format: boring deterministic code losing the design review to "just ask the model."</a:t>
             </a:r>
             <a:endParaRPr lang="en-US" sz="1200"/>
           </a:p>
@@ -1957,7 +2002,7 @@
                 <a:ea typeface="Arial"/>
                 <a:cs typeface="Arial"/>
               </a:rPr>
-              <a:t xml:space="preserve">So: your per-token price has fallen off a cliff over the last few years, and your bill went up. Everyone in this room has had that conversation with a CFO and lost it. You are not being gouged and you did not do anything wrong. Spend is price times consumption, and consumption is jobs times calls per job times tokens per call. Cheapness moved every term on the right. Epoch's data through 2025 shows the price of a fixed capability falling fast and very unevenly by task, which is real and worth knowing, and is also exactly the condition under which total spend rises.</a:t>
+              <a:t xml:space="preserve">I call it architectural obesity. It is not that any one of those calls is wrong. Redundancy is worth paying for, big context is worth paying for, three parallel attempts are sometimes exactly right. The failure is that nobody measured what the extra call bought, because at these prices nobody had to.</a:t>
             </a:r>
             <a:endParaRPr lang="en-US" sz="1200"/>
           </a:p>
@@ -2003,7 +2048,7 @@
                 <a:ea typeface="Arial"/>
                 <a:cs typeface="Arial"/>
               </a:rPr>
-              <a:t xml:space="preserve">Jevons (1865), The Coal Question, chapter VII. Duranton and Turner (2011), The Fundamental Law of Road Congestion, American Economic Review 101(6).</a:t>
+              <a:t xml:space="preserve">A design review where "inference is basically free" ended the discussion.</a:t>
             </a:r>
             <a:endParaRPr lang="en-US" sz="1200"/>
           </a:p>
@@ -2049,7 +2094,7 @@
                 <a:ea typeface="Arial"/>
                 <a:cs typeface="Arial"/>
               </a:rPr>
-              <a:t xml:space="preserve">Cottier, Snodin, Owen, Adamczewski (Epoch AI, March 2025), [LLM inference prices have fallen rapidly but unequally across tasks](https://epoch.ai/data-insights/llm-inference-price-trends). Check for a newer edition before each delivery.</a:t>
+              <a:t xml:space="preserve">Ask for one show of hands: who has shipped a frontier call where a lookup would do? Then admit you have too.</a:t>
             </a:r>
             <a:endParaRPr lang="en-US" sz="1200"/>
           </a:p>
@@ -2095,99 +2140,7 @@
                 <a:ea typeface="Arial"/>
                 <a:cs typeface="Arial"/>
               </a:rPr>
-              <a:t xml:space="preserve"/>
-            </a:r>
-            <a:endParaRPr lang="en-US" sz="1200"/>
-          </a:p>
-          <a:p>
-            <a:pPr marL="0" indent="0">
-              <a:lnSpc>
-                <a:spcPts val="1560"/>
-              </a:lnSpc>
-              <a:spcAft>
-                <a:spcPts val="0"/>
-              </a:spcAft>
-              <a:buNone/>
-            </a:pPr>
-            <a:r>
-              <a:rPr lang="en-US" sz="1200" b="0">
-                <a:solidFill>
-                  <a:srgbClr val="202b33"/>
-                </a:solidFill>
-                <a:latin typeface="Arial"/>
-                <a:ea typeface="Arial"/>
-                <a:cs typeface="Arial"/>
-              </a:rPr>
-              <a:t xml:space="preserve"/>
-            </a:r>
-            <a:endParaRPr lang="en-US" sz="1200"/>
-          </a:p>
-          <a:p>
-            <a:pPr marL="0" indent="0">
-              <a:lnSpc>
-                <a:spcPts val="1560"/>
-              </a:lnSpc>
-              <a:spcAft>
-                <a:spcPts val="0"/>
-              </a:spcAft>
-              <a:buNone/>
-            </a:pPr>
-            <a:r>
-              <a:rPr lang="en-US" sz="1200" b="0">
-                <a:solidFill>
-                  <a:srgbClr val="202b33"/>
-                </a:solidFill>
-                <a:latin typeface="Arial"/>
-                <a:ea typeface="Arial"/>
-                <a:cs typeface="Arial"/>
-              </a:rPr>
-              <a:t xml:space="preserve"/>
-            </a:r>
-            <a:endParaRPr lang="en-US" sz="1200"/>
-          </a:p>
-          <a:p>
-            <a:pPr marL="0" indent="0">
-              <a:lnSpc>
-                <a:spcPts val="1560"/>
-              </a:lnSpc>
-              <a:spcAft>
-                <a:spcPts val="0"/>
-              </a:spcAft>
-              <a:buNone/>
-            </a:pPr>
-            <a:r>
-              <a:rPr lang="en-US" sz="1200" b="0">
-                <a:solidFill>
-                  <a:srgbClr val="202b33"/>
-                </a:solidFill>
-                <a:latin typeface="Arial"/>
-                <a:ea typeface="Arial"/>
-                <a:cs typeface="Arial"/>
-              </a:rPr>
-              <a:t xml:space="preserve"/>
-            </a:r>
-            <a:endParaRPr lang="en-US" sz="1200"/>
-          </a:p>
-          <a:p>
-            <a:pPr marL="0" indent="0">
-              <a:lnSpc>
-                <a:spcPts val="1560"/>
-              </a:lnSpc>
-              <a:spcAft>
-                <a:spcPts val="0"/>
-              </a:spcAft>
-              <a:buNone/>
-            </a:pPr>
-            <a:r>
-              <a:rPr lang="en-US" sz="1200" b="0">
-                <a:solidFill>
-                  <a:srgbClr val="202b33"/>
-                </a:solidFill>
-                <a:latin typeface="Arial"/>
-                <a:ea typeface="Arial"/>
-                <a:cs typeface="Arial"/>
-              </a:rPr>
-              <a:t xml:space="preserve"/>
+              <a:t xml:space="preserve">Bridge: the lots stay built, and whoever chooses the architecture is not whoever pays the bill sixty days later.</a:t>
             </a:r>
             <a:endParaRPr lang="en-US" sz="1200"/>
           </a:p>
@@ -2300,7 +2253,7 @@
                 <a:ea typeface="Arial"/>
                 <a:cs typeface="Arial"/>
               </a:rPr>
-              <a:t xml:space="preserve">Source slide 7. 07:15 to 09:30</a:t>
+              <a:t xml:space="preserve">Source slide 10. 09:30 to 11:30</a:t>
             </a:r>
             <a:endParaRPr lang="en-US" sz="1200"/>
           </a:p>
@@ -2346,7 +2299,7 @@
                 <a:ea typeface="Arial"/>
                 <a:cs typeface="Arial"/>
               </a:rPr>
-              <a:t xml:space="preserve">Density: a frontier call where a lookup would do</a:t>
+              <a:t xml:space="preserve">Cost per accepted outcome = total spend ÷ accepted jobs</a:t>
             </a:r>
             <a:endParaRPr lang="en-US" sz="1200"/>
           </a:p>
@@ -2392,7 +2345,7 @@
                 <a:ea typeface="Arial"/>
                 <a:cs typeface="Arial"/>
               </a:rPr>
-              <a:t xml:space="preserve">Business mix: products viable only at today's rate</a:t>
+              <a:t xml:space="preserve">75% accepted means you pay 1.33× sticker. 45% means 2.22×.</a:t>
             </a:r>
             <a:endParaRPr lang="en-US" sz="1200"/>
           </a:p>
@@ -2438,7 +2391,7 @@
                 <a:ea typeface="Arial"/>
                 <a:cs typeface="Arial"/>
               </a:rPr>
-              <a:t xml:space="preserve">Bundled rent: unlimited usage promised in a contract</a:t>
+              <a:t xml:space="preserve">A 30-point acceptance drop costs exactly what doubling every token price costs.</a:t>
             </a:r>
             <a:endParaRPr lang="en-US" sz="1200"/>
           </a:p>
@@ -2484,7 +2437,7 @@
                 <a:ea typeface="Arial"/>
                 <a:cs typeface="Arial"/>
               </a:rPr>
-              <a:t xml:space="preserve">Small format: deterministic code loses the design review</a:t>
+              <a:t xml:space="preserve">Before any dollar figure, define the denominator. An accepted outcome meets a rule you wrote down. An impressive answer that a human quietly repairs afterwards is not a success, it is a success plus a hidden salary. Count inference, tools, infrastructure and recovery. A blended token rate is not a unit economics model.</a:t>
             </a:r>
             <a:endParaRPr lang="en-US" sz="1200"/>
           </a:p>
@@ -2530,7 +2483,7 @@
                 <a:ea typeface="Arial"/>
                 <a:cs typeface="Arial"/>
               </a:rPr>
-              <a:t xml:space="preserve">Walk the same chain through your stack. Density: a frontier call where a cache, a regex, or a dictionary lookup would have done, because the call looked free. Longer context, more retries, more competing branches, frontier by default. Business mix: products whose unit economics only work at promotional rates, crowding out products that would have worked at any price. Bundled rent: unlimited-usage promises to customers, baked into a contract, priced against an input you do not control. And the small format: boring deterministic code losing the design review to "just ask the model."</a:t>
+              <a:t xml:space="preserve">Now the part worth remembering. Divide by the acceptance rate and you get a multiplier on your sticker price. Seventy-five percent acceptance means you are paying one and a third times the list price for every result you keep. Forty-five percent means two point two. Run those two numbers together: dropping from seventy-five to forty-five percent acceptance costs you exactly the same as every token in your stack doubling in price overnight. One of those is on the front page. The other one is a Tuesday.</a:t>
             </a:r>
             <a:endParaRPr lang="en-US" sz="1200"/>
           </a:p>
@@ -2576,29 +2529,6 @@
                 <a:ea typeface="Arial"/>
                 <a:cs typeface="Arial"/>
               </a:rPr>
-              <a:t xml:space="preserve">I call it architectural obesity. It is not that any one of those calls is wrong. Redundancy is worth paying for, big context is worth paying for, three parallel attempts are sometimes exactly right. The failure is that nobody measured what the extra call bought, because at these prices nobody had to.</a:t>
-            </a:r>
-            <a:endParaRPr lang="en-US" sz="1200"/>
-          </a:p>
-          <a:p>
-            <a:pPr marL="0" indent="0">
-              <a:lnSpc>
-                <a:spcPts val="1560"/>
-              </a:lnSpc>
-              <a:spcAft>
-                <a:spcPts val="0"/>
-              </a:spcAft>
-              <a:buNone/>
-            </a:pPr>
-            <a:r>
-              <a:rPr lang="en-US" sz="1200" b="0">
-                <a:solidFill>
-                  <a:srgbClr val="202b33"/>
-                </a:solidFill>
-                <a:latin typeface="Arial"/>
-                <a:ea typeface="Arial"/>
-                <a:cs typeface="Arial"/>
-              </a:rPr>
               <a:t xml:space="preserve"/>
             </a:r>
             <a:endParaRPr lang="en-US" sz="1200"/>
@@ -2622,29 +2552,6 @@
                 <a:ea typeface="Arial"/>
                 <a:cs typeface="Arial"/>
               </a:rPr>
-              <a:t xml:space="preserve">A design review where "inference is basically free" ended the discussion.</a:t>
-            </a:r>
-            <a:endParaRPr lang="en-US" sz="1200"/>
-          </a:p>
-          <a:p>
-            <a:pPr marL="0" indent="0">
-              <a:lnSpc>
-                <a:spcPts val="1560"/>
-              </a:lnSpc>
-              <a:spcAft>
-                <a:spcPts val="0"/>
-              </a:spcAft>
-              <a:buNone/>
-            </a:pPr>
-            <a:r>
-              <a:rPr lang="en-US" sz="1200" b="0">
-                <a:solidFill>
-                  <a:srgbClr val="202b33"/>
-                </a:solidFill>
-                <a:latin typeface="Arial"/>
-                <a:ea typeface="Arial"/>
-                <a:cs typeface="Arial"/>
-              </a:rPr>
               <a:t xml:space="preserve"/>
             </a:r>
             <a:endParaRPr lang="en-US" sz="1200"/>
@@ -2668,7 +2575,7 @@
                 <a:ea typeface="Arial"/>
                 <a:cs typeface="Arial"/>
               </a:rPr>
-              <a:t xml:space="preserve">Ask for one show of hands: who has shipped a frontier call where a lookup would do? Then admit you have too.</a:t>
+              <a:t xml:space="preserve">Do the division on stage. Thirty seconds: name your product's accepted outcome in one sentence. If that is hard, the economics conversation just found a product problem.</a:t>
             </a:r>
             <a:endParaRPr lang="en-US" sz="1200"/>
           </a:p>
@@ -2714,7 +2621,7 @@
                 <a:ea typeface="Arial"/>
                 <a:cs typeface="Arial"/>
               </a:rPr>
-              <a:t xml:space="preserve">Bridge: the lots stay built, and whoever chooses the architecture is not whoever pays the bill sixty days later.</a:t>
+              <a:t xml:space="preserve">Bridge: run the sweep at one, two, five and ten times price, then multiply by your own volume before you feel anything about it.</a:t>
             </a:r>
             <a:endParaRPr lang="en-US" sz="1200"/>
           </a:p>
@@ -2827,7 +2734,7 @@
                 <a:ea typeface="Arial"/>
                 <a:cs typeface="Arial"/>
               </a:rPr>
-              <a:t xml:space="preserve">Source slide 10. 09:30 to 11:30</a:t>
+              <a:t xml:space="preserve">Source slide 12. 11:30 to 13:15</a:t>
             </a:r>
             <a:endParaRPr lang="en-US" sz="1200"/>
           </a:p>
@@ -2873,7 +2780,7 @@
                 <a:ea typeface="Arial"/>
                 <a:cs typeface="Arial"/>
               </a:rPr>
-              <a:t xml:space="preserve">Cost per accepted outcome = total spend ÷ accepted jobs</a:t>
+              <a:t xml:space="preserve">Word six: asset specificity. Word seven: hold-up.</a:t>
             </a:r>
             <a:endParaRPr lang="en-US" sz="1200"/>
           </a:p>
@@ -2919,7 +2826,7 @@
                 <a:ea typeface="Arial"/>
                 <a:cs typeface="Arial"/>
               </a:rPr>
-              <a:t xml:space="preserve">75% accepted means you pay 1.33× sticker. 45% means 2.22×.</a:t>
+              <a:t xml:space="preserve">An investment worth a lot inside this relationship and little outside it</a:t>
             </a:r>
             <a:endParaRPr lang="en-US" sz="1200"/>
           </a:p>
@@ -2965,7 +2872,7 @@
                 <a:ea typeface="Arial"/>
                 <a:cs typeface="Arial"/>
               </a:rPr>
-              <a:t xml:space="preserve">A 30-point acceptance drop costs exactly what doubling every token price costs.</a:t>
+              <a:t xml:space="preserve">Your prompts, evals, fine-tunes, and that unlimited-usage clause</a:t>
             </a:r>
             <a:endParaRPr lang="en-US" sz="1200"/>
           </a:p>
@@ -3011,7 +2918,7 @@
                 <a:ea typeface="Arial"/>
                 <a:cs typeface="Arial"/>
               </a:rPr>
-              <a:t xml:space="preserve">Before any dollar figure, define the denominator. An accepted outcome meets a rule you wrote down. An impressive answer that a human quietly repairs afterwards is not a success, it is a success plus a hidden salary. Count inference, tools, infrastructure and recovery. A blended token rate is not a unit economics model.</a:t>
+              <a:t xml:space="preserve">This is the slide I would keep if you cut every other one. Oliver Williamson won a Nobel in 2009 for working out what happens when two parties make investments that only pay off inside their relationship. He called it asset specificity, and the trouble it produces is called hold-up.</a:t>
             </a:r>
             <a:endParaRPr lang="en-US" sz="1200"/>
           </a:p>
@@ -3057,7 +2964,7 @@
                 <a:ea typeface="Arial"/>
                 <a:cs typeface="Arial"/>
               </a:rPr>
-              <a:t xml:space="preserve">Now the part worth remembering. Divide by the acceptance rate and you get a multiplier on your sticker price. Seventy-five percent acceptance means you are paying one and a third times the list price for every result you keep. Forty-five percent means two point two. Run those two numbers together: dropping from seventy-five to forty-five percent acceptance costs you exactly the same as every token in your stack doubling in price overnight. One of those is on the front page. The other one is a Tuesday.</a:t>
+              <a:t xml:space="preserve">So stop thinking of this as shopping, where the customer holds the power because they can leave. You are contracting, with a much better capitalized counterparty, and your architecture is the collateral. That reframe is the whole talk, and everything after this is just a way of reducing specificity or pricing the exposure.</a:t>
             </a:r>
             <a:endParaRPr lang="en-US" sz="1200"/>
           </a:p>
@@ -3149,29 +3056,6 @@
                 <a:ea typeface="Arial"/>
                 <a:cs typeface="Arial"/>
               </a:rPr>
-              <a:t xml:space="preserve">Do the division on stage. Thirty seconds: name your product's accepted outcome in one sentence. If that is hard, the economics conversation just found a product problem.</a:t>
-            </a:r>
-            <a:endParaRPr lang="en-US" sz="1200"/>
-          </a:p>
-          <a:p>
-            <a:pPr marL="0" indent="0">
-              <a:lnSpc>
-                <a:spcPts val="1560"/>
-              </a:lnSpc>
-              <a:spcAft>
-                <a:spcPts val="0"/>
-              </a:spcAft>
-              <a:buNone/>
-            </a:pPr>
-            <a:r>
-              <a:rPr lang="en-US" sz="1200" b="0">
-                <a:solidFill>
-                  <a:srgbClr val="202b33"/>
-                </a:solidFill>
-                <a:latin typeface="Arial"/>
-                <a:ea typeface="Arial"/>
-                <a:cs typeface="Arial"/>
-              </a:rPr>
               <a:t xml:space="preserve"/>
             </a:r>
             <a:endParaRPr lang="en-US" sz="1200"/>
@@ -3195,7 +3079,30 @@
                 <a:ea typeface="Arial"/>
                 <a:cs typeface="Arial"/>
               </a:rPr>
-              <a:t xml:space="preserve">Bridge: run the sweep at one, two, five and ten times price, then multiply by your own volume before you feel anything about it.</a:t>
+              <a:t xml:space="preserve"/>
+            </a:r>
+            <a:endParaRPr lang="en-US" sz="1200"/>
+          </a:p>
+          <a:p>
+            <a:pPr marL="0" indent="0">
+              <a:lnSpc>
+                <a:spcPts val="1560"/>
+              </a:lnSpc>
+              <a:spcAft>
+                <a:spcPts val="0"/>
+              </a:spcAft>
+              <a:buNone/>
+            </a:pPr>
+            <a:r>
+              <a:rPr lang="en-US" sz="1200" b="0">
+                <a:solidFill>
+                  <a:srgbClr val="202b33"/>
+                </a:solidFill>
+                <a:latin typeface="Arial"/>
+                <a:ea typeface="Arial"/>
+                <a:cs typeface="Arial"/>
+              </a:rPr>
+              <a:t xml:space="preserve">Bridge: so price reversibility as the option it is, and bring three prices to the design review: today, without the offer, and the most you could survive.</a:t>
             </a:r>
             <a:endParaRPr lang="en-US" sz="1200"/>
           </a:p>
@@ -3308,7 +3215,7 @@
                 <a:ea typeface="Arial"/>
                 <a:cs typeface="Arial"/>
               </a:rPr>
-              <a:t xml:space="preserve">Source slide 12. 11:30 to 13:30</a:t>
+              <a:t xml:space="preserve">Source slide 15. 13:15 to 15:00</a:t>
             </a:r>
             <a:endParaRPr lang="en-US" sz="1200"/>
           </a:p>
@@ -3354,7 +3261,7 @@
                 <a:ea typeface="Arial"/>
                 <a:cs typeface="Arial"/>
               </a:rPr>
-              <a:t xml:space="preserve">Word six: asset specificity. Word seven: hold-up.</a:t>
+              <a:t xml:space="preserve">Externality · Induced demand · Jevons paradox · Path dependence</a:t>
             </a:r>
             <a:endParaRPr lang="en-US" sz="1200"/>
           </a:p>
@@ -3400,7 +3307,7 @@
                 <a:ea typeface="Arial"/>
                 <a:cs typeface="Arial"/>
               </a:rPr>
-              <a:t xml:space="preserve">An investment worth a lot inside this relationship and little outside it</a:t>
+              <a:t xml:space="preserve">Moral hazard · Credible commitment · Asset specificity · Real option</a:t>
             </a:r>
             <a:endParaRPr lang="en-US" sz="1200"/>
           </a:p>
@@ -3446,7 +3353,7 @@
                 <a:ea typeface="Arial"/>
                 <a:cs typeface="Arial"/>
               </a:rPr>
-              <a:t xml:space="preserve">Your prompts, evals, fine-tunes, and that unlimited-usage clause</a:t>
+              <a:t xml:space="preserve">Build for more than one price.</a:t>
             </a:r>
             <a:endParaRPr lang="en-US" sz="1200"/>
           </a:p>
@@ -3492,7 +3399,7 @@
                 <a:ea typeface="Arial"/>
                 <a:cs typeface="Arial"/>
               </a:rPr>
-              <a:t xml:space="preserve">This is the slide I would keep if you cut every other one. Oliver Williamson won a Nobel in 2009 for working out what happens when two parties make investments that only pay off inside their relationship. He called it asset specificity, and the trouble it produces is called hold-up.</a:t>
+              <a:t xml:space="preserve">Back to the electricity. Use the cheap input. It is genuinely great and I am not asking anyone to be miserable about it. Just understand what it encouraged you to build, and keep the expensive decisions reversible while you find out.</a:t>
             </a:r>
             <a:endParaRPr lang="en-US" sz="1200"/>
           </a:p>
@@ -3538,580 +3445,7 @@
                 <a:ea typeface="Arial"/>
                 <a:cs typeface="Arial"/>
               </a:rPr>
-              <a:t xml:space="preserve">The shape is always the same. You make an investment that is worth a great deal here and very little anywhere else. That surplus, the part that exists only because you are locked in, is a prize, and at renewal your counterparty can reach for it. Nobody has to be a villain. It is simply what the structure permits, and rational parties do it.</a:t>
-            </a:r>
-            <a:endParaRPr lang="en-US" sz="1200"/>
-          </a:p>
-          <a:p>
-            <a:pPr marL="0" indent="0">
-              <a:lnSpc>
-                <a:spcPts val="1560"/>
-              </a:lnSpc>
-              <a:spcAft>
-                <a:spcPts val="0"/>
-              </a:spcAft>
-              <a:buNone/>
-            </a:pPr>
-            <a:r>
-              <a:rPr lang="en-US" sz="1200" b="0">
-                <a:solidFill>
-                  <a:srgbClr val="202b33"/>
-                </a:solidFill>
-                <a:latin typeface="Arial"/>
-                <a:ea typeface="Arial"/>
-                <a:cs typeface="Arial"/>
-              </a:rPr>
-              <a:t xml:space="preserve"/>
-            </a:r>
-            <a:endParaRPr lang="en-US" sz="1200"/>
-          </a:p>
-          <a:p>
-            <a:pPr marL="0" indent="0">
-              <a:lnSpc>
-                <a:spcPts val="1560"/>
-              </a:lnSpc>
-              <a:spcAft>
-                <a:spcPts val="0"/>
-              </a:spcAft>
-              <a:buNone/>
-            </a:pPr>
-            <a:r>
-              <a:rPr lang="en-US" sz="1200" b="0">
-                <a:solidFill>
-                  <a:srgbClr val="202b33"/>
-                </a:solidFill>
-                <a:latin typeface="Arial"/>
-                <a:ea typeface="Arial"/>
-                <a:cs typeface="Arial"/>
-              </a:rPr>
-              <a:t xml:space="preserve">So stop thinking of this as shopping, where the customer holds the power because they can leave. You are contracting, with a much better capitalized counterparty, and your architecture is the collateral. That reframe is the whole talk, and everything after this is just a way of reducing specificity or pricing the exposure.</a:t>
-            </a:r>
-            <a:endParaRPr lang="en-US" sz="1200"/>
-          </a:p>
-          <a:p>
-            <a:pPr marL="0" indent="0">
-              <a:lnSpc>
-                <a:spcPts val="1560"/>
-              </a:lnSpc>
-              <a:spcAft>
-                <a:spcPts val="0"/>
-              </a:spcAft>
-              <a:buNone/>
-            </a:pPr>
-            <a:r>
-              <a:rPr lang="en-US" sz="1200" b="0">
-                <a:solidFill>
-                  <a:srgbClr val="202b33"/>
-                </a:solidFill>
-                <a:latin typeface="Arial"/>
-                <a:ea typeface="Arial"/>
-                <a:cs typeface="Arial"/>
-              </a:rPr>
-              <a:t xml:space="preserve"/>
-            </a:r>
-            <a:endParaRPr lang="en-US" sz="1200"/>
-          </a:p>
-          <a:p>
-            <a:pPr marL="0" indent="0">
-              <a:lnSpc>
-                <a:spcPts val="1560"/>
-              </a:lnSpc>
-              <a:spcAft>
-                <a:spcPts val="0"/>
-              </a:spcAft>
-              <a:buNone/>
-            </a:pPr>
-            <a:r>
-              <a:rPr lang="en-US" sz="1200" b="0">
-                <a:solidFill>
-                  <a:srgbClr val="202b33"/>
-                </a:solidFill>
-                <a:latin typeface="Arial"/>
-                <a:ea typeface="Arial"/>
-                <a:cs typeface="Arial"/>
-              </a:rPr>
-              <a:t xml:space="preserve"/>
-            </a:r>
-            <a:endParaRPr lang="en-US" sz="1200"/>
-          </a:p>
-          <a:p>
-            <a:pPr marL="0" indent="0">
-              <a:lnSpc>
-                <a:spcPts val="1560"/>
-              </a:lnSpc>
-              <a:spcAft>
-                <a:spcPts val="0"/>
-              </a:spcAft>
-              <a:buNone/>
-            </a:pPr>
-            <a:r>
-              <a:rPr lang="en-US" sz="1200" b="0">
-                <a:solidFill>
-                  <a:srgbClr val="202b33"/>
-                </a:solidFill>
-                <a:latin typeface="Arial"/>
-                <a:ea typeface="Arial"/>
-                <a:cs typeface="Arial"/>
-              </a:rPr>
-              <a:t xml:space="preserve"/>
-            </a:r>
-            <a:endParaRPr lang="en-US" sz="1200"/>
-          </a:p>
-          <a:p>
-            <a:pPr marL="0" indent="0">
-              <a:lnSpc>
-                <a:spcPts val="1560"/>
-              </a:lnSpc>
-              <a:spcAft>
-                <a:spcPts val="0"/>
-              </a:spcAft>
-              <a:buNone/>
-            </a:pPr>
-            <a:r>
-              <a:rPr lang="en-US" sz="1200" b="0">
-                <a:solidFill>
-                  <a:srgbClr val="202b33"/>
-                </a:solidFill>
-                <a:latin typeface="Arial"/>
-                <a:ea typeface="Arial"/>
-                <a:cs typeface="Arial"/>
-              </a:rPr>
-              <a:t xml:space="preserve"/>
-            </a:r>
-            <a:endParaRPr lang="en-US" sz="1200"/>
-          </a:p>
-          <a:p>
-            <a:pPr marL="0" indent="0">
-              <a:lnSpc>
-                <a:spcPts val="1560"/>
-              </a:lnSpc>
-              <a:spcAft>
-                <a:spcPts val="0"/>
-              </a:spcAft>
-              <a:buNone/>
-            </a:pPr>
-            <a:r>
-              <a:rPr lang="en-US" sz="1200" b="0">
-                <a:solidFill>
-                  <a:srgbClr val="202b33"/>
-                </a:solidFill>
-                <a:latin typeface="Arial"/>
-                <a:ea typeface="Arial"/>
-                <a:cs typeface="Arial"/>
-              </a:rPr>
-              <a:t xml:space="preserve"/>
-            </a:r>
-            <a:endParaRPr lang="en-US" sz="1200"/>
-          </a:p>
-          <a:p>
-            <a:pPr marL="0" indent="0">
-              <a:lnSpc>
-                <a:spcPts val="1560"/>
-              </a:lnSpc>
-              <a:spcAft>
-                <a:spcPts val="0"/>
-              </a:spcAft>
-              <a:buNone/>
-            </a:pPr>
-            <a:r>
-              <a:rPr lang="en-US" sz="1200" b="0">
-                <a:solidFill>
-                  <a:srgbClr val="202b33"/>
-                </a:solidFill>
-                <a:latin typeface="Arial"/>
-                <a:ea typeface="Arial"/>
-                <a:cs typeface="Arial"/>
-              </a:rPr>
-              <a:t xml:space="preserve">Bridge: so price reversibility as the option it is, and bring three prices to the design review: today, without the offer, and the most you could survive.</a:t>
-            </a:r>
-            <a:endParaRPr lang="en-US" sz="1200"/>
-          </a:p>
-        </p:txBody>
-      </p:sp>
-    </p:spTree>
-  </p:cSld>
-  <p:clrMapOvr>
-    <a:masterClrMapping/>
-  </p:clrMapOvr>
-</p:notes>
-</file>
-
-<file path=ppt/notesSlides/notesSlide8.xml><?xml version="1.0" encoding="utf-8"?>
-<p:notes xmlns:a="http://schemas.openxmlformats.org/drawingml/2006/main" xmlns:r="http://schemas.openxmlformats.org/officeDocument/2006/relationships" xmlns:p="http://schemas.openxmlformats.org/presentationml/2006/main">
-  <p:cSld>
-    <p:spTree>
-      <p:nvGrpSpPr>
-        <p:cNvPr id="1" name=""/>
-        <p:cNvGrpSpPr/>
-        <p:nvPr/>
-      </p:nvGrpSpPr>
-      <p:grpSpPr>
-        <a:xfrm>
-          <a:off x="0" y="0"/>
-          <a:ext cx="0" cy="0"/>
-          <a:chOff x="0" y="0"/>
-          <a:chExt cx="0" cy="0"/>
-        </a:xfrm>
-      </p:grpSpPr>
-      <p:sp>
-        <p:nvSpPr>
-          <p:cNvPr id="2" name="Presenter notes"/>
-          <p:cNvSpPr txBox="1"/>
-          <p:nvPr>
-            <p:ph type="body" idx="1"/>
-          </p:nvPr>
-        </p:nvSpPr>
-        <p:spPr>
-          <a:xfrm>
-            <a:off x="457200" y="1428750"/>
-            <a:ext cx="5715000" cy="6667500"/>
-          </a:xfrm>
-        </p:spPr>
-        <p:txBody>
-          <a:bodyPr/>
-          <a:lstStyle/>
-          <a:p>
-            <a:pPr marL="0" indent="0">
-              <a:lnSpc>
-                <a:spcPts val="1560"/>
-              </a:lnSpc>
-              <a:spcAft>
-                <a:spcPts val="0"/>
-              </a:spcAft>
-              <a:buNone/>
-            </a:pPr>
-            <a:r>
-              <a:rPr lang="en-US" sz="1200" b="0">
-                <a:solidFill>
-                  <a:srgbClr val="202b33"/>
-                </a:solidFill>
-                <a:latin typeface="Arial"/>
-                <a:ea typeface="Arial"/>
-                <a:cs typeface="Arial"/>
-              </a:rPr>
-              <a:t xml:space="preserve">Buy Me a Free Tier</a:t>
-            </a:r>
-            <a:endParaRPr lang="en-US" sz="1200"/>
-          </a:p>
-          <a:p>
-            <a:pPr marL="0" indent="0">
-              <a:lnSpc>
-                <a:spcPts val="1560"/>
-              </a:lnSpc>
-              <a:spcAft>
-                <a:spcPts val="0"/>
-              </a:spcAft>
-              <a:buNone/>
-            </a:pPr>
-            <a:r>
-              <a:rPr lang="en-US" sz="1200" b="0">
-                <a:solidFill>
-                  <a:srgbClr val="202b33"/>
-                </a:solidFill>
-                <a:latin typeface="Arial"/>
-                <a:ea typeface="Arial"/>
-                <a:cs typeface="Arial"/>
-              </a:rPr>
-              <a:t xml:space="preserve"/>
-            </a:r>
-            <a:endParaRPr lang="en-US" sz="1200"/>
-          </a:p>
-          <a:p>
-            <a:pPr marL="0" indent="0">
-              <a:lnSpc>
-                <a:spcPts val="1560"/>
-              </a:lnSpc>
-              <a:spcAft>
-                <a:spcPts val="0"/>
-              </a:spcAft>
-              <a:buNone/>
-            </a:pPr>
-            <a:r>
-              <a:rPr lang="en-US" sz="1200" b="0">
-                <a:solidFill>
-                  <a:srgbClr val="202b33"/>
-                </a:solidFill>
-                <a:latin typeface="Arial"/>
-                <a:ea typeface="Arial"/>
-                <a:cs typeface="Arial"/>
-              </a:rPr>
-              <a:t xml:space="preserve">Source slide 15. 13:30 to 15:00</a:t>
-            </a:r>
-            <a:endParaRPr lang="en-US" sz="1200"/>
-          </a:p>
-          <a:p>
-            <a:pPr marL="0" indent="0">
-              <a:lnSpc>
-                <a:spcPts val="1560"/>
-              </a:lnSpc>
-              <a:spcAft>
-                <a:spcPts val="0"/>
-              </a:spcAft>
-              <a:buNone/>
-            </a:pPr>
-            <a:r>
-              <a:rPr lang="en-US" sz="1200" b="0">
-                <a:solidFill>
-                  <a:srgbClr val="202b33"/>
-                </a:solidFill>
-                <a:latin typeface="Arial"/>
-                <a:ea typeface="Arial"/>
-                <a:cs typeface="Arial"/>
-              </a:rPr>
-              <a:t xml:space="preserve"/>
-            </a:r>
-            <a:endParaRPr lang="en-US" sz="1200"/>
-          </a:p>
-          <a:p>
-            <a:pPr marL="0" indent="0">
-              <a:lnSpc>
-                <a:spcPts val="1560"/>
-              </a:lnSpc>
-              <a:spcAft>
-                <a:spcPts val="0"/>
-              </a:spcAft>
-              <a:buNone/>
-            </a:pPr>
-            <a:r>
-              <a:rPr lang="en-US" sz="1200" b="0">
-                <a:solidFill>
-                  <a:srgbClr val="202b33"/>
-                </a:solidFill>
-                <a:latin typeface="Arial"/>
-                <a:ea typeface="Arial"/>
-                <a:cs typeface="Arial"/>
-              </a:rPr>
-              <a:t xml:space="preserve">Externality · Induced demand · Jevons paradox · Path dependence</a:t>
-            </a:r>
-            <a:endParaRPr lang="en-US" sz="1200"/>
-          </a:p>
-          <a:p>
-            <a:pPr marL="0" indent="0">
-              <a:lnSpc>
-                <a:spcPts val="1560"/>
-              </a:lnSpc>
-              <a:spcAft>
-                <a:spcPts val="0"/>
-              </a:spcAft>
-              <a:buNone/>
-            </a:pPr>
-            <a:r>
-              <a:rPr lang="en-US" sz="1200" b="0">
-                <a:solidFill>
-                  <a:srgbClr val="202b33"/>
-                </a:solidFill>
-                <a:latin typeface="Arial"/>
-                <a:ea typeface="Arial"/>
-                <a:cs typeface="Arial"/>
-              </a:rPr>
-              <a:t xml:space="preserve"/>
-            </a:r>
-            <a:endParaRPr lang="en-US" sz="1200"/>
-          </a:p>
-          <a:p>
-            <a:pPr marL="0" indent="0">
-              <a:lnSpc>
-                <a:spcPts val="1560"/>
-              </a:lnSpc>
-              <a:spcAft>
-                <a:spcPts val="0"/>
-              </a:spcAft>
-              <a:buNone/>
-            </a:pPr>
-            <a:r>
-              <a:rPr lang="en-US" sz="1200" b="0">
-                <a:solidFill>
-                  <a:srgbClr val="202b33"/>
-                </a:solidFill>
-                <a:latin typeface="Arial"/>
-                <a:ea typeface="Arial"/>
-                <a:cs typeface="Arial"/>
-              </a:rPr>
-              <a:t xml:space="preserve">Moral hazard · Credible commitment · Asset specificity · Real option</a:t>
-            </a:r>
-            <a:endParaRPr lang="en-US" sz="1200"/>
-          </a:p>
-          <a:p>
-            <a:pPr marL="0" indent="0">
-              <a:lnSpc>
-                <a:spcPts val="1560"/>
-              </a:lnSpc>
-              <a:spcAft>
-                <a:spcPts val="0"/>
-              </a:spcAft>
-              <a:buNone/>
-            </a:pPr>
-            <a:r>
-              <a:rPr lang="en-US" sz="1200" b="0">
-                <a:solidFill>
-                  <a:srgbClr val="202b33"/>
-                </a:solidFill>
-                <a:latin typeface="Arial"/>
-                <a:ea typeface="Arial"/>
-                <a:cs typeface="Arial"/>
-              </a:rPr>
-              <a:t xml:space="preserve"/>
-            </a:r>
-            <a:endParaRPr lang="en-US" sz="1200"/>
-          </a:p>
-          <a:p>
-            <a:pPr marL="0" indent="0">
-              <a:lnSpc>
-                <a:spcPts val="1560"/>
-              </a:lnSpc>
-              <a:spcAft>
-                <a:spcPts val="0"/>
-              </a:spcAft>
-              <a:buNone/>
-            </a:pPr>
-            <a:r>
-              <a:rPr lang="en-US" sz="1200" b="0">
-                <a:solidFill>
-                  <a:srgbClr val="202b33"/>
-                </a:solidFill>
-                <a:latin typeface="Arial"/>
-                <a:ea typeface="Arial"/>
-                <a:cs typeface="Arial"/>
-              </a:rPr>
-              <a:t xml:space="preserve">Build for more than one price.</a:t>
-            </a:r>
-            <a:endParaRPr lang="en-US" sz="1200"/>
-          </a:p>
-          <a:p>
-            <a:pPr marL="0" indent="0">
-              <a:lnSpc>
-                <a:spcPts val="1560"/>
-              </a:lnSpc>
-              <a:spcAft>
-                <a:spcPts val="0"/>
-              </a:spcAft>
-              <a:buNone/>
-            </a:pPr>
-            <a:r>
-              <a:rPr lang="en-US" sz="1200" b="0">
-                <a:solidFill>
-                  <a:srgbClr val="202b33"/>
-                </a:solidFill>
-                <a:latin typeface="Arial"/>
-                <a:ea typeface="Arial"/>
-                <a:cs typeface="Arial"/>
-              </a:rPr>
-              <a:t xml:space="preserve"/>
-            </a:r>
-            <a:endParaRPr lang="en-US" sz="1200"/>
-          </a:p>
-          <a:p>
-            <a:pPr marL="0" indent="0">
-              <a:lnSpc>
-                <a:spcPts val="1560"/>
-              </a:lnSpc>
-              <a:spcAft>
-                <a:spcPts val="0"/>
-              </a:spcAft>
-              <a:buNone/>
-            </a:pPr>
-            <a:r>
-              <a:rPr lang="en-US" sz="1200" b="0">
-                <a:solidFill>
-                  <a:srgbClr val="202b33"/>
-                </a:solidFill>
-                <a:latin typeface="Arial"/>
-                <a:ea typeface="Arial"/>
-                <a:cs typeface="Arial"/>
-              </a:rPr>
-              <a:t xml:space="preserve">Back to the electricity. Use the cheap input. It is genuinely great and I am not asking anyone to be miserable about it. Just understand what it encouraged you to build, and keep the expensive decisions reversible while you find out.</a:t>
-            </a:r>
-            <a:endParaRPr lang="en-US" sz="1200"/>
-          </a:p>
-          <a:p>
-            <a:pPr marL="0" indent="0">
-              <a:lnSpc>
-                <a:spcPts val="1560"/>
-              </a:lnSpc>
-              <a:spcAft>
-                <a:spcPts val="0"/>
-              </a:spcAft>
-              <a:buNone/>
-            </a:pPr>
-            <a:r>
-              <a:rPr lang="en-US" sz="1200" b="0">
-                <a:solidFill>
-                  <a:srgbClr val="202b33"/>
-                </a:solidFill>
-                <a:latin typeface="Arial"/>
-                <a:ea typeface="Arial"/>
-                <a:cs typeface="Arial"/>
-              </a:rPr>
-              <a:t xml:space="preserve"/>
-            </a:r>
-            <a:endParaRPr lang="en-US" sz="1200"/>
-          </a:p>
-          <a:p>
-            <a:pPr marL="0" indent="0">
-              <a:lnSpc>
-                <a:spcPts val="1560"/>
-              </a:lnSpc>
-              <a:spcAft>
-                <a:spcPts val="0"/>
-              </a:spcAft>
-              <a:buNone/>
-            </a:pPr>
-            <a:r>
-              <a:rPr lang="en-US" sz="1200" b="0">
-                <a:solidFill>
-                  <a:srgbClr val="202b33"/>
-                </a:solidFill>
-                <a:latin typeface="Arial"/>
-                <a:ea typeface="Arial"/>
-                <a:cs typeface="Arial"/>
-              </a:rPr>
               <a:t xml:space="preserve">There are your eight words. Externality, because the cost moved rather than vanished. Induced demand and Jevons, because cheaper made you use more, not less. Path dependence, because the lots stay built. Moral hazard, because whoever chooses is not whoever pays. Credible commitment, because those contracts are moves in a game and not disclosures about it. Asset specificity, because your architecture is worth more here than anywhere else. And real option, because reversibility is something you buy, not something you feel.</a:t>
-            </a:r>
-            <a:endParaRPr lang="en-US" sz="1200"/>
-          </a:p>
-          <a:p>
-            <a:pPr marL="0" indent="0">
-              <a:lnSpc>
-                <a:spcPts val="1560"/>
-              </a:lnSpc>
-              <a:spcAft>
-                <a:spcPts val="0"/>
-              </a:spcAft>
-              <a:buNone/>
-            </a:pPr>
-            <a:r>
-              <a:rPr lang="en-US" sz="1200" b="0">
-                <a:solidFill>
-                  <a:srgbClr val="202b33"/>
-                </a:solidFill>
-                <a:latin typeface="Arial"/>
-                <a:ea typeface="Arial"/>
-                <a:cs typeface="Arial"/>
-              </a:rPr>
-              <a:t xml:space="preserve"/>
-            </a:r>
-            <a:endParaRPr lang="en-US" sz="1200"/>
-          </a:p>
-          <a:p>
-            <a:pPr marL="0" indent="0">
-              <a:lnSpc>
-                <a:spcPts val="1560"/>
-              </a:lnSpc>
-              <a:spcAft>
-                <a:spcPts val="0"/>
-              </a:spcAft>
-              <a:buNone/>
-            </a:pPr>
-            <a:r>
-              <a:rPr lang="en-US" sz="1200" b="0">
-                <a:solidFill>
-                  <a:srgbClr val="202b33"/>
-                </a:solidFill>
-                <a:latin typeface="Arial"/>
-                <a:ea typeface="Arial"/>
-                <a:cs typeface="Arial"/>
-              </a:rPr>
-              <a:t xml:space="preserve">Some low prices are temporary. Some are a preview of genuinely cheaper production. You do not have to know which. You have to measure outcomes and keep the big choices reversible either way.</a:t>
             </a:r>
             <a:endParaRPr lang="en-US" sz="1200"/>
           </a:p>
@@ -4881,7 +4215,7 @@
                 <a:ea typeface="Arial"/>
                 <a:cs typeface="Arial"/>
               </a:rPr>
-              <a:t xml:space="preserve">02 / 08    SOURCE SLIDE 3</a:t>
+              <a:t xml:space="preserve">02 / 07    SOURCE SLIDE 3</a:t>
             </a:r>
             <a:endParaRPr lang="en-US" sz="1350"/>
           </a:p>
@@ -5352,7 +4686,7 @@
                 <a:ea typeface="Arial"/>
                 <a:cs typeface="Arial"/>
               </a:rPr>
-              <a:t xml:space="preserve">03 / 08    SOURCE SLIDE 5</a:t>
+              <a:t xml:space="preserve">03 / 07    SOURCE SLIDE 6</a:t>
             </a:r>
             <a:endParaRPr lang="en-US" sz="1350"/>
           </a:p>
@@ -5401,7 +4735,7 @@
                 <a:ea typeface="Arial"/>
                 <a:cs typeface="Arial"/>
               </a:rPr>
-              <a:t xml:space="preserve">Free parking was never free</a:t>
+              <a:t xml:space="preserve">Jevons, coal, and the extra lane</a:t>
             </a:r>
             <a:endParaRPr lang="en-US" sz="3900"/>
           </a:p>
@@ -5499,7 +4833,7 @@
                 <a:ea typeface="Arial"/>
                 <a:cs typeface="Arial"/>
               </a:rPr>
-              <a:t xml:space="preserve">The driver sees no meter, so demand looks infinite</a:t>
+              <a:t xml:space="preserve">1865: better engines burned more coal, not less</a:t>
             </a:r>
             <a:endParaRPr lang="en-US" sz="3150"/>
           </a:p>
@@ -5597,7 +4931,7 @@
                 <a:ea typeface="Arial"/>
                 <a:cs typeface="Arial"/>
               </a:rPr>
-              <a:t xml:space="preserve">The cost moves into rents, prices, and land</a:t>
+              <a:t xml:space="preserve">Add a lane, get traffic. Elasticity near one.</a:t>
             </a:r>
             <a:endParaRPr lang="en-US" sz="3150"/>
           </a:p>
@@ -5661,7 +4995,7 @@
         <p:spPr>
           <a:xfrm>
             <a:off x="2000250" y="4345305"/>
-            <a:ext cx="11029950" cy="539115"/>
+            <a:ext cx="11029950" cy="1059180"/>
           </a:xfrm>
           <a:prstGeom prst="rect">
             <a:avLst/>
@@ -5695,7 +5029,30 @@
                 <a:ea typeface="Arial"/>
                 <a:cs typeface="Arial"/>
               </a:rPr>
-              <a:t xml:space="preserve">Word one: externality</a:t>
+              <a:t xml:space="preserve">Spend = price × jobs × calls per job × tokens per</a:t>
+            </a:r>
+            <a:endParaRPr lang="en-US" sz="3150"/>
+          </a:p>
+          <a:p>
+            <a:pPr marL="0" indent="0">
+              <a:lnSpc>
+                <a:spcPts val="4095"/>
+              </a:lnSpc>
+              <a:spcAft>
+                <a:spcPts val="0"/>
+              </a:spcAft>
+              <a:buNone/>
+            </a:pPr>
+            <a:r>
+              <a:rPr lang="en-US" sz="3150" b="0">
+                <a:solidFill>
+                  <a:srgbClr val="F5F1E9"/>
+                </a:solidFill>
+                <a:latin typeface="Arial"/>
+                <a:ea typeface="Arial"/>
+                <a:cs typeface="Arial"/>
+              </a:rPr>
+              <a:t xml:space="preserve">call</a:t>
             </a:r>
             <a:endParaRPr lang="en-US" sz="3150"/>
           </a:p>
@@ -5875,7 +5232,7 @@
                 <a:ea typeface="Arial"/>
                 <a:cs typeface="Arial"/>
               </a:rPr>
-              <a:t xml:space="preserve">04 / 08    SOURCE SLIDE 6</a:t>
+              <a:t xml:space="preserve">04 / 07    SOURCE SLIDE 7</a:t>
             </a:r>
             <a:endParaRPr lang="en-US" sz="1350"/>
           </a:p>
@@ -5924,7 +5281,7 @@
                 <a:ea typeface="Arial"/>
                 <a:cs typeface="Arial"/>
               </a:rPr>
-              <a:t xml:space="preserve">Jevons, coal, and the extra lane</a:t>
+              <a:t xml:space="preserve">Now do it to software</a:t>
             </a:r>
             <a:endParaRPr lang="en-US" sz="3900"/>
           </a:p>
@@ -6022,7 +5379,7 @@
                 <a:ea typeface="Arial"/>
                 <a:cs typeface="Arial"/>
               </a:rPr>
-              <a:t xml:space="preserve">1865: better engines burned more coal, not less</a:t>
+              <a:t xml:space="preserve">Density: a frontier call where a lookup would do</a:t>
             </a:r>
             <a:endParaRPr lang="en-US" sz="3150"/>
           </a:p>
@@ -6120,7 +5477,7 @@
                 <a:ea typeface="Arial"/>
                 <a:cs typeface="Arial"/>
               </a:rPr>
-              <a:t xml:space="preserve">Add a lane, get traffic. Elasticity near one.</a:t>
+              <a:t xml:space="preserve">Business mix: products viable only at today's rate</a:t>
             </a:r>
             <a:endParaRPr lang="en-US" sz="3150"/>
           </a:p>
@@ -6184,6 +5541,104 @@
         <p:spPr>
           <a:xfrm>
             <a:off x="2000250" y="4345305"/>
+            <a:ext cx="11029950" cy="539115"/>
+          </a:xfrm>
+          <a:prstGeom prst="rect">
+            <a:avLst/>
+          </a:prstGeom>
+          <a:noFill/>
+          <a:ln>
+            <a:noFill/>
+          </a:ln>
+        </p:spPr>
+        <p:txBody>
+          <a:bodyPr wrap="none" lIns="0" tIns="0" rIns="0" bIns="0" anchor="t">
+            <a:noAutofit/>
+          </a:bodyPr>
+          <a:lstStyle/>
+          <a:p>
+            <a:pPr marL="0" indent="0">
+              <a:lnSpc>
+                <a:spcPts val="4095"/>
+              </a:lnSpc>
+              <a:spcAft>
+                <a:spcPts val="0"/>
+              </a:spcAft>
+              <a:buNone/>
+            </a:pPr>
+            <a:r>
+              <a:rPr lang="en-US" sz="3150" b="0">
+                <a:solidFill>
+                  <a:srgbClr val="F5F1E9"/>
+                </a:solidFill>
+                <a:latin typeface="Arial"/>
+                <a:ea typeface="Arial"/>
+                <a:cs typeface="Arial"/>
+              </a:rPr>
+              <a:t xml:space="preserve">Bundled rent: unlimited usage promised in a contract</a:t>
+            </a:r>
+            <a:endParaRPr lang="en-US" sz="3150"/>
+          </a:p>
+        </p:txBody>
+      </p:sp>
+      <p:sp>
+        <p:nvSpPr>
+          <p:cNvPr id="10" name="Text 10"/>
+          <p:cNvSpPr txBox="1"/>
+          <p:nvPr/>
+        </p:nvSpPr>
+        <p:spPr>
+          <a:xfrm>
+            <a:off x="685800" y="5132070"/>
+            <a:ext cx="904875" cy="476250"/>
+          </a:xfrm>
+          <a:prstGeom prst="rect">
+            <a:avLst/>
+          </a:prstGeom>
+          <a:noFill/>
+          <a:ln>
+            <a:noFill/>
+          </a:ln>
+        </p:spPr>
+        <p:txBody>
+          <a:bodyPr wrap="none" lIns="0" tIns="0" rIns="0" bIns="0" anchor="t">
+            <a:noAutofit/>
+          </a:bodyPr>
+          <a:lstStyle/>
+          <a:p>
+            <a:pPr marL="0" indent="0">
+              <a:lnSpc>
+                <a:spcPts val="2438"/>
+              </a:lnSpc>
+              <a:spcAft>
+                <a:spcPts val="0"/>
+              </a:spcAft>
+              <a:buNone/>
+            </a:pPr>
+            <a:r>
+              <a:rPr lang="en-US" sz="1875" b="0">
+                <a:solidFill>
+                  <a:srgbClr val="EFB45F"/>
+                </a:solidFill>
+                <a:latin typeface="Arial"/>
+                <a:ea typeface="Arial"/>
+                <a:cs typeface="Arial"/>
+              </a:rPr>
+              <a:t xml:space="preserve">04</a:t>
+            </a:r>
+            <a:endParaRPr lang="en-US" sz="1875"/>
+          </a:p>
+        </p:txBody>
+      </p:sp>
+      <p:sp>
+        <p:nvSpPr>
+          <p:cNvPr id="11" name="Text 11"/>
+          <p:cNvSpPr txBox="1"/>
+          <p:nvPr/>
+        </p:nvSpPr>
+        <p:spPr>
+          <a:xfrm>
+            <a:off x="2000250" y="5132070"/>
             <a:ext cx="11029950" cy="1059180"/>
           </a:xfrm>
           <a:prstGeom prst="rect">
@@ -6218,7 +5673,7 @@
                 <a:ea typeface="Arial"/>
                 <a:cs typeface="Arial"/>
               </a:rPr>
-              <a:t xml:space="preserve">Spend = price × jobs × calls per job × tokens per</a:t>
+              <a:t xml:space="preserve">Small format: deterministic code loses the design</a:t>
             </a:r>
             <a:endParaRPr lang="en-US" sz="3150"/>
           </a:p>
@@ -6241,7 +5696,7 @@
                 <a:ea typeface="Arial"/>
                 <a:cs typeface="Arial"/>
               </a:rPr>
-              <a:t xml:space="preserve">call</a:t>
+              <a:t xml:space="preserve">review</a:t>
             </a:r>
             <a:endParaRPr lang="en-US" sz="3150"/>
           </a:p>
@@ -6249,7 +5704,7 @@
       </p:sp>
       <p:sp>
         <p:nvSpPr>
-          <p:cNvPr id="10" name="Text 10"/>
+          <p:cNvPr id="12" name="Text 12"/>
           <p:cNvSpPr txBox="1"/>
           <p:nvPr/>
         </p:nvSpPr>
@@ -6298,7 +5753,7 @@
       </p:sp>
       <p:sp>
         <p:nvSpPr>
-          <p:cNvPr id="11" name="Text 11"/>
+          <p:cNvPr id="13" name="Text 13"/>
           <p:cNvSpPr txBox="1"/>
           <p:nvPr/>
         </p:nvSpPr>
@@ -6421,7 +5876,7 @@
                 <a:ea typeface="Arial"/>
                 <a:cs typeface="Arial"/>
               </a:rPr>
-              <a:t xml:space="preserve">05 / 08    SOURCE SLIDE 7</a:t>
+              <a:t xml:space="preserve">05 / 07    SOURCE SLIDE 10</a:t>
             </a:r>
             <a:endParaRPr lang="en-US" sz="1350"/>
           </a:p>
@@ -6470,7 +5925,7 @@
                 <a:ea typeface="Arial"/>
                 <a:cs typeface="Arial"/>
               </a:rPr>
-              <a:t xml:space="preserve">Now do it to software</a:t>
+              <a:t xml:space="preserve">Doubling on a Tuesday</a:t>
             </a:r>
             <a:endParaRPr lang="en-US" sz="3900"/>
           </a:p>
@@ -6534,7 +5989,7 @@
         <p:spPr>
           <a:xfrm>
             <a:off x="2000250" y="2771775"/>
-            <a:ext cx="11029950" cy="539115"/>
+            <a:ext cx="11029950" cy="1059180"/>
           </a:xfrm>
           <a:prstGeom prst="rect">
             <a:avLst/>
@@ -6568,7 +6023,30 @@
                 <a:ea typeface="Arial"/>
                 <a:cs typeface="Arial"/>
               </a:rPr>
-              <a:t xml:space="preserve">Density: a frontier call where a lookup would do</a:t>
+              <a:t xml:space="preserve">Cost per accepted outcome = total spend ÷ accepted</a:t>
+            </a:r>
+            <a:endParaRPr lang="en-US" sz="3150"/>
+          </a:p>
+          <a:p>
+            <a:pPr marL="0" indent="0">
+              <a:lnSpc>
+                <a:spcPts val="4095"/>
+              </a:lnSpc>
+              <a:spcAft>
+                <a:spcPts val="0"/>
+              </a:spcAft>
+              <a:buNone/>
+            </a:pPr>
+            <a:r>
+              <a:rPr lang="en-US" sz="3150" b="0">
+                <a:solidFill>
+                  <a:srgbClr val="F5F1E9"/>
+                </a:solidFill>
+                <a:latin typeface="Arial"/>
+                <a:ea typeface="Arial"/>
+                <a:cs typeface="Arial"/>
+              </a:rPr>
+              <a:t xml:space="preserve">jobs</a:t>
             </a:r>
             <a:endParaRPr lang="en-US" sz="3150"/>
           </a:p>
@@ -6582,7 +6060,7 @@
         </p:nvSpPr>
         <p:spPr>
           <a:xfrm>
-            <a:off x="685800" y="3558540"/>
+            <a:off x="685800" y="4078605"/>
             <a:ext cx="904875" cy="476250"/>
           </a:xfrm>
           <a:prstGeom prst="rect">
@@ -6631,8 +6109,8 @@
         </p:nvSpPr>
         <p:spPr>
           <a:xfrm>
-            <a:off x="2000250" y="3558540"/>
-            <a:ext cx="11029950" cy="539115"/>
+            <a:off x="2000250" y="4078605"/>
+            <a:ext cx="11029950" cy="1059180"/>
           </a:xfrm>
           <a:prstGeom prst="rect">
             <a:avLst/>
@@ -6666,7 +6144,30 @@
                 <a:ea typeface="Arial"/>
                 <a:cs typeface="Arial"/>
               </a:rPr>
-              <a:t xml:space="preserve">Business mix: products viable only at today's rate</a:t>
+              <a:t xml:space="preserve">75% accepted means you pay 1.33× sticker. 45% means</a:t>
+            </a:r>
+            <a:endParaRPr lang="en-US" sz="3150"/>
+          </a:p>
+          <a:p>
+            <a:pPr marL="0" indent="0">
+              <a:lnSpc>
+                <a:spcPts val="4095"/>
+              </a:lnSpc>
+              <a:spcAft>
+                <a:spcPts val="0"/>
+              </a:spcAft>
+              <a:buNone/>
+            </a:pPr>
+            <a:r>
+              <a:rPr lang="en-US" sz="3150" b="0">
+                <a:solidFill>
+                  <a:srgbClr val="F5F1E9"/>
+                </a:solidFill>
+                <a:latin typeface="Arial"/>
+                <a:ea typeface="Arial"/>
+                <a:cs typeface="Arial"/>
+              </a:rPr>
+              <a:t xml:space="preserve">2.22×.</a:t>
             </a:r>
             <a:endParaRPr lang="en-US" sz="3150"/>
           </a:p>
@@ -6680,7 +6181,7 @@
         </p:nvSpPr>
         <p:spPr>
           <a:xfrm>
-            <a:off x="685800" y="4345305"/>
+            <a:off x="685800" y="5385435"/>
             <a:ext cx="904875" cy="476250"/>
           </a:xfrm>
           <a:prstGeom prst="rect">
@@ -6729,105 +6230,7 @@
         </p:nvSpPr>
         <p:spPr>
           <a:xfrm>
-            <a:off x="2000250" y="4345305"/>
-            <a:ext cx="11029950" cy="539115"/>
-          </a:xfrm>
-          <a:prstGeom prst="rect">
-            <a:avLst/>
-          </a:prstGeom>
-          <a:noFill/>
-          <a:ln>
-            <a:noFill/>
-          </a:ln>
-        </p:spPr>
-        <p:txBody>
-          <a:bodyPr wrap="none" lIns="0" tIns="0" rIns="0" bIns="0" anchor="t">
-            <a:noAutofit/>
-          </a:bodyPr>
-          <a:lstStyle/>
-          <a:p>
-            <a:pPr marL="0" indent="0">
-              <a:lnSpc>
-                <a:spcPts val="4095"/>
-              </a:lnSpc>
-              <a:spcAft>
-                <a:spcPts val="0"/>
-              </a:spcAft>
-              <a:buNone/>
-            </a:pPr>
-            <a:r>
-              <a:rPr lang="en-US" sz="3150" b="0">
-                <a:solidFill>
-                  <a:srgbClr val="F5F1E9"/>
-                </a:solidFill>
-                <a:latin typeface="Arial"/>
-                <a:ea typeface="Arial"/>
-                <a:cs typeface="Arial"/>
-              </a:rPr>
-              <a:t xml:space="preserve">Bundled rent: unlimited usage promised in a contract</a:t>
-            </a:r>
-            <a:endParaRPr lang="en-US" sz="3150"/>
-          </a:p>
-        </p:txBody>
-      </p:sp>
-      <p:sp>
-        <p:nvSpPr>
-          <p:cNvPr id="10" name="Text 10"/>
-          <p:cNvSpPr txBox="1"/>
-          <p:nvPr/>
-        </p:nvSpPr>
-        <p:spPr>
-          <a:xfrm>
-            <a:off x="685800" y="5132070"/>
-            <a:ext cx="904875" cy="476250"/>
-          </a:xfrm>
-          <a:prstGeom prst="rect">
-            <a:avLst/>
-          </a:prstGeom>
-          <a:noFill/>
-          <a:ln>
-            <a:noFill/>
-          </a:ln>
-        </p:spPr>
-        <p:txBody>
-          <a:bodyPr wrap="none" lIns="0" tIns="0" rIns="0" bIns="0" anchor="t">
-            <a:noAutofit/>
-          </a:bodyPr>
-          <a:lstStyle/>
-          <a:p>
-            <a:pPr marL="0" indent="0">
-              <a:lnSpc>
-                <a:spcPts val="2438"/>
-              </a:lnSpc>
-              <a:spcAft>
-                <a:spcPts val="0"/>
-              </a:spcAft>
-              <a:buNone/>
-            </a:pPr>
-            <a:r>
-              <a:rPr lang="en-US" sz="1875" b="0">
-                <a:solidFill>
-                  <a:srgbClr val="EFB45F"/>
-                </a:solidFill>
-                <a:latin typeface="Arial"/>
-                <a:ea typeface="Arial"/>
-                <a:cs typeface="Arial"/>
-              </a:rPr>
-              <a:t xml:space="preserve">04</a:t>
-            </a:r>
-            <a:endParaRPr lang="en-US" sz="1875"/>
-          </a:p>
-        </p:txBody>
-      </p:sp>
-      <p:sp>
-        <p:nvSpPr>
-          <p:cNvPr id="11" name="Text 11"/>
-          <p:cNvSpPr txBox="1"/>
-          <p:nvPr/>
-        </p:nvSpPr>
-        <p:spPr>
-          <a:xfrm>
-            <a:off x="2000250" y="5132070"/>
+            <a:off x="2000250" y="5385435"/>
             <a:ext cx="11029950" cy="1059180"/>
           </a:xfrm>
           <a:prstGeom prst="rect">
@@ -6862,7 +6265,7 @@
                 <a:ea typeface="Arial"/>
                 <a:cs typeface="Arial"/>
               </a:rPr>
-              <a:t xml:space="preserve">Small format: deterministic code loses the design</a:t>
+              <a:t xml:space="preserve">A 30-point acceptance drop costs exactly what</a:t>
             </a:r>
             <a:endParaRPr lang="en-US" sz="3150"/>
           </a:p>
@@ -6885,7 +6288,7 @@
                 <a:ea typeface="Arial"/>
                 <a:cs typeface="Arial"/>
               </a:rPr>
-              <a:t xml:space="preserve">review</a:t>
+              <a:t xml:space="preserve">doubling every token price costs.</a:t>
             </a:r>
             <a:endParaRPr lang="en-US" sz="3150"/>
           </a:p>
@@ -6893,7 +6296,7 @@
       </p:sp>
       <p:sp>
         <p:nvSpPr>
-          <p:cNvPr id="12" name="Text 12"/>
+          <p:cNvPr id="10" name="Text 10"/>
           <p:cNvSpPr txBox="1"/>
           <p:nvPr/>
         </p:nvSpPr>
@@ -6942,7 +6345,7 @@
       </p:sp>
       <p:sp>
         <p:nvSpPr>
-          <p:cNvPr id="13" name="Text 13"/>
+          <p:cNvPr id="11" name="Text 11"/>
           <p:cNvSpPr txBox="1"/>
           <p:nvPr/>
         </p:nvSpPr>
@@ -7065,7 +6468,7 @@
                 <a:ea typeface="Arial"/>
                 <a:cs typeface="Arial"/>
               </a:rPr>
-              <a:t xml:space="preserve">06 / 08    SOURCE SLIDE 10</a:t>
+              <a:t xml:space="preserve">06 / 07    SOURCE SLIDE 12</a:t>
             </a:r>
             <a:endParaRPr lang="en-US" sz="1350"/>
           </a:p>
@@ -7114,7 +6517,7 @@
                 <a:ea typeface="Arial"/>
                 <a:cs typeface="Arial"/>
               </a:rPr>
-              <a:t xml:space="preserve">Doubling on a Tuesday</a:t>
+              <a:t xml:space="preserve">You are not shopping, you are contracting</a:t>
             </a:r>
             <a:endParaRPr lang="en-US" sz="3900"/>
           </a:p>
@@ -7178,6 +6581,104 @@
         <p:spPr>
           <a:xfrm>
             <a:off x="2000250" y="2771775"/>
+            <a:ext cx="11029950" cy="539115"/>
+          </a:xfrm>
+          <a:prstGeom prst="rect">
+            <a:avLst/>
+          </a:prstGeom>
+          <a:noFill/>
+          <a:ln>
+            <a:noFill/>
+          </a:ln>
+        </p:spPr>
+        <p:txBody>
+          <a:bodyPr wrap="none" lIns="0" tIns="0" rIns="0" bIns="0" anchor="t">
+            <a:noAutofit/>
+          </a:bodyPr>
+          <a:lstStyle/>
+          <a:p>
+            <a:pPr marL="0" indent="0">
+              <a:lnSpc>
+                <a:spcPts val="4095"/>
+              </a:lnSpc>
+              <a:spcAft>
+                <a:spcPts val="0"/>
+              </a:spcAft>
+              <a:buNone/>
+            </a:pPr>
+            <a:r>
+              <a:rPr lang="en-US" sz="3150" b="0">
+                <a:solidFill>
+                  <a:srgbClr val="F5F1E9"/>
+                </a:solidFill>
+                <a:latin typeface="Arial"/>
+                <a:ea typeface="Arial"/>
+                <a:cs typeface="Arial"/>
+              </a:rPr>
+              <a:t xml:space="preserve">Word six: asset specificity. Word seven: hold-up.</a:t>
+            </a:r>
+            <a:endParaRPr lang="en-US" sz="3150"/>
+          </a:p>
+        </p:txBody>
+      </p:sp>
+      <p:sp>
+        <p:nvSpPr>
+          <p:cNvPr id="6" name="Text 6"/>
+          <p:cNvSpPr txBox="1"/>
+          <p:nvPr/>
+        </p:nvSpPr>
+        <p:spPr>
+          <a:xfrm>
+            <a:off x="685800" y="3558540"/>
+            <a:ext cx="904875" cy="476250"/>
+          </a:xfrm>
+          <a:prstGeom prst="rect">
+            <a:avLst/>
+          </a:prstGeom>
+          <a:noFill/>
+          <a:ln>
+            <a:noFill/>
+          </a:ln>
+        </p:spPr>
+        <p:txBody>
+          <a:bodyPr wrap="none" lIns="0" tIns="0" rIns="0" bIns="0" anchor="t">
+            <a:noAutofit/>
+          </a:bodyPr>
+          <a:lstStyle/>
+          <a:p>
+            <a:pPr marL="0" indent="0">
+              <a:lnSpc>
+                <a:spcPts val="2438"/>
+              </a:lnSpc>
+              <a:spcAft>
+                <a:spcPts val="0"/>
+              </a:spcAft>
+              <a:buNone/>
+            </a:pPr>
+            <a:r>
+              <a:rPr lang="en-US" sz="1875" b="0">
+                <a:solidFill>
+                  <a:srgbClr val="EFB45F"/>
+                </a:solidFill>
+                <a:latin typeface="Arial"/>
+                <a:ea typeface="Arial"/>
+                <a:cs typeface="Arial"/>
+              </a:rPr>
+              <a:t xml:space="preserve">02</a:t>
+            </a:r>
+            <a:endParaRPr lang="en-US" sz="1875"/>
+          </a:p>
+        </p:txBody>
+      </p:sp>
+      <p:sp>
+        <p:nvSpPr>
+          <p:cNvPr id="7" name="Text 7"/>
+          <p:cNvSpPr txBox="1"/>
+          <p:nvPr/>
+        </p:nvSpPr>
+        <p:spPr>
+          <a:xfrm>
+            <a:off x="2000250" y="3558540"/>
             <a:ext cx="11029950" cy="1059180"/>
           </a:xfrm>
           <a:prstGeom prst="rect">
@@ -7212,7 +6713,7 @@
                 <a:ea typeface="Arial"/>
                 <a:cs typeface="Arial"/>
               </a:rPr>
-              <a:t xml:space="preserve">Cost per accepted outcome = total spend ÷ accepted</a:t>
+              <a:t xml:space="preserve">An investment worth a lot inside this relationship</a:t>
             </a:r>
             <a:endParaRPr lang="en-US" sz="3150"/>
           </a:p>
@@ -7235,7 +6736,7 @@
                 <a:ea typeface="Arial"/>
                 <a:cs typeface="Arial"/>
               </a:rPr>
-              <a:t xml:space="preserve">jobs</a:t>
+              <a:t xml:space="preserve">and little outside it</a:t>
             </a:r>
             <a:endParaRPr lang="en-US" sz="3150"/>
           </a:p>
@@ -7243,13 +6744,13 @@
       </p:sp>
       <p:sp>
         <p:nvSpPr>
-          <p:cNvPr id="6" name="Text 6"/>
+          <p:cNvPr id="8" name="Text 8"/>
           <p:cNvSpPr txBox="1"/>
           <p:nvPr/>
         </p:nvSpPr>
         <p:spPr>
           <a:xfrm>
-            <a:off x="685800" y="4078605"/>
+            <a:off x="685800" y="4865370"/>
             <a:ext cx="904875" cy="476250"/>
           </a:xfrm>
           <a:prstGeom prst="rect">
@@ -7284,7 +6785,7 @@
                 <a:ea typeface="Arial"/>
                 <a:cs typeface="Arial"/>
               </a:rPr>
-              <a:t xml:space="preserve">02</a:t>
+              <a:t xml:space="preserve">03</a:t>
             </a:r>
             <a:endParaRPr lang="en-US" sz="1875"/>
           </a:p>
@@ -7292,13 +6793,13 @@
       </p:sp>
       <p:sp>
         <p:nvSpPr>
-          <p:cNvPr id="7" name="Text 7"/>
+          <p:cNvPr id="9" name="Text 9"/>
           <p:cNvSpPr txBox="1"/>
           <p:nvPr/>
         </p:nvSpPr>
         <p:spPr>
           <a:xfrm>
-            <a:off x="2000250" y="4078605"/>
+            <a:off x="2000250" y="4865370"/>
             <a:ext cx="11029950" cy="1059180"/>
           </a:xfrm>
           <a:prstGeom prst="rect">
@@ -7333,7 +6834,7 @@
                 <a:ea typeface="Arial"/>
                 <a:cs typeface="Arial"/>
               </a:rPr>
-              <a:t xml:space="preserve">75% accepted means you pay 1.33× sticker. 45% means</a:t>
+              <a:t xml:space="preserve">Your prompts, evals, fine-tunes, and that</a:t>
             </a:r>
             <a:endParaRPr lang="en-US" sz="3150"/>
           </a:p>
@@ -7356,128 +6857,7 @@
                 <a:ea typeface="Arial"/>
                 <a:cs typeface="Arial"/>
               </a:rPr>
-              <a:t xml:space="preserve">2.22×.</a:t>
-            </a:r>
-            <a:endParaRPr lang="en-US" sz="3150"/>
-          </a:p>
-        </p:txBody>
-      </p:sp>
-      <p:sp>
-        <p:nvSpPr>
-          <p:cNvPr id="8" name="Text 8"/>
-          <p:cNvSpPr txBox="1"/>
-          <p:nvPr/>
-        </p:nvSpPr>
-        <p:spPr>
-          <a:xfrm>
-            <a:off x="685800" y="5385435"/>
-            <a:ext cx="904875" cy="476250"/>
-          </a:xfrm>
-          <a:prstGeom prst="rect">
-            <a:avLst/>
-          </a:prstGeom>
-          <a:noFill/>
-          <a:ln>
-            <a:noFill/>
-          </a:ln>
-        </p:spPr>
-        <p:txBody>
-          <a:bodyPr wrap="none" lIns="0" tIns="0" rIns="0" bIns="0" anchor="t">
-            <a:noAutofit/>
-          </a:bodyPr>
-          <a:lstStyle/>
-          <a:p>
-            <a:pPr marL="0" indent="0">
-              <a:lnSpc>
-                <a:spcPts val="2438"/>
-              </a:lnSpc>
-              <a:spcAft>
-                <a:spcPts val="0"/>
-              </a:spcAft>
-              <a:buNone/>
-            </a:pPr>
-            <a:r>
-              <a:rPr lang="en-US" sz="1875" b="0">
-                <a:solidFill>
-                  <a:srgbClr val="EFB45F"/>
-                </a:solidFill>
-                <a:latin typeface="Arial"/>
-                <a:ea typeface="Arial"/>
-                <a:cs typeface="Arial"/>
-              </a:rPr>
-              <a:t xml:space="preserve">03</a:t>
-            </a:r>
-            <a:endParaRPr lang="en-US" sz="1875"/>
-          </a:p>
-        </p:txBody>
-      </p:sp>
-      <p:sp>
-        <p:nvSpPr>
-          <p:cNvPr id="9" name="Text 9"/>
-          <p:cNvSpPr txBox="1"/>
-          <p:nvPr/>
-        </p:nvSpPr>
-        <p:spPr>
-          <a:xfrm>
-            <a:off x="2000250" y="5385435"/>
-            <a:ext cx="11029950" cy="1059180"/>
-          </a:xfrm>
-          <a:prstGeom prst="rect">
-            <a:avLst/>
-          </a:prstGeom>
-          <a:noFill/>
-          <a:ln>
-            <a:noFill/>
-          </a:ln>
-        </p:spPr>
-        <p:txBody>
-          <a:bodyPr wrap="none" lIns="0" tIns="0" rIns="0" bIns="0" anchor="t">
-            <a:noAutofit/>
-          </a:bodyPr>
-          <a:lstStyle/>
-          <a:p>
-            <a:pPr marL="0" indent="0">
-              <a:lnSpc>
-                <a:spcPts val="4095"/>
-              </a:lnSpc>
-              <a:spcAft>
-                <a:spcPts val="0"/>
-              </a:spcAft>
-              <a:buNone/>
-            </a:pPr>
-            <a:r>
-              <a:rPr lang="en-US" sz="3150" b="0">
-                <a:solidFill>
-                  <a:srgbClr val="F5F1E9"/>
-                </a:solidFill>
-                <a:latin typeface="Arial"/>
-                <a:ea typeface="Arial"/>
-                <a:cs typeface="Arial"/>
-              </a:rPr>
-              <a:t xml:space="preserve">A 30-point acceptance drop costs exactly what</a:t>
-            </a:r>
-            <a:endParaRPr lang="en-US" sz="3150"/>
-          </a:p>
-          <a:p>
-            <a:pPr marL="0" indent="0">
-              <a:lnSpc>
-                <a:spcPts val="4095"/>
-              </a:lnSpc>
-              <a:spcAft>
-                <a:spcPts val="0"/>
-              </a:spcAft>
-              <a:buNone/>
-            </a:pPr>
-            <a:r>
-              <a:rPr lang="en-US" sz="3150" b="0">
-                <a:solidFill>
-                  <a:srgbClr val="F5F1E9"/>
-                </a:solidFill>
-                <a:latin typeface="Arial"/>
-                <a:ea typeface="Arial"/>
-                <a:cs typeface="Arial"/>
-              </a:rPr>
-              <a:t xml:space="preserve">doubling every token price costs.</a:t>
+              <a:t xml:space="preserve">unlimited-usage clause</a:t>
             </a:r>
             <a:endParaRPr lang="en-US" sz="3150"/>
           </a:p>
@@ -7657,7 +7037,7 @@
                 <a:ea typeface="Arial"/>
                 <a:cs typeface="Arial"/>
               </a:rPr>
-              <a:t xml:space="preserve">07 / 08    SOURCE SLIDE 12</a:t>
+              <a:t xml:space="preserve">07 / 07    SOURCE SLIDE 15</a:t>
             </a:r>
             <a:endParaRPr lang="en-US" sz="1350"/>
           </a:p>
@@ -7706,7 +7086,7 @@
                 <a:ea typeface="Arial"/>
                 <a:cs typeface="Arial"/>
               </a:rPr>
-              <a:t xml:space="preserve">You are not shopping, you are contracting</a:t>
+              <a:t xml:space="preserve">Cheap intelligence changes incentives first</a:t>
             </a:r>
             <a:endParaRPr lang="en-US" sz="3900"/>
           </a:p>
@@ -7770,6 +7150,248 @@
         <p:spPr>
           <a:xfrm>
             <a:off x="2000250" y="2771775"/>
+            <a:ext cx="11029950" cy="1059180"/>
+          </a:xfrm>
+          <a:prstGeom prst="rect">
+            <a:avLst/>
+          </a:prstGeom>
+          <a:noFill/>
+          <a:ln>
+            <a:noFill/>
+          </a:ln>
+        </p:spPr>
+        <p:txBody>
+          <a:bodyPr wrap="none" lIns="0" tIns="0" rIns="0" bIns="0" anchor="t">
+            <a:noAutofit/>
+          </a:bodyPr>
+          <a:lstStyle/>
+          <a:p>
+            <a:pPr marL="0" indent="0">
+              <a:lnSpc>
+                <a:spcPts val="4095"/>
+              </a:lnSpc>
+              <a:spcAft>
+                <a:spcPts val="0"/>
+              </a:spcAft>
+              <a:buNone/>
+            </a:pPr>
+            <a:r>
+              <a:rPr lang="en-US" sz="3150" b="0">
+                <a:solidFill>
+                  <a:srgbClr val="F5F1E9"/>
+                </a:solidFill>
+                <a:latin typeface="Arial"/>
+                <a:ea typeface="Arial"/>
+                <a:cs typeface="Arial"/>
+              </a:rPr>
+              <a:t xml:space="preserve">Externality · Induced demand · Jevons paradox · Path</a:t>
+            </a:r>
+            <a:endParaRPr lang="en-US" sz="3150"/>
+          </a:p>
+          <a:p>
+            <a:pPr marL="0" indent="0">
+              <a:lnSpc>
+                <a:spcPts val="4095"/>
+              </a:lnSpc>
+              <a:spcAft>
+                <a:spcPts val="0"/>
+              </a:spcAft>
+              <a:buNone/>
+            </a:pPr>
+            <a:r>
+              <a:rPr lang="en-US" sz="3150" b="0">
+                <a:solidFill>
+                  <a:srgbClr val="F5F1E9"/>
+                </a:solidFill>
+                <a:latin typeface="Arial"/>
+                <a:ea typeface="Arial"/>
+                <a:cs typeface="Arial"/>
+              </a:rPr>
+              <a:t xml:space="preserve">dependence</a:t>
+            </a:r>
+            <a:endParaRPr lang="en-US" sz="3150"/>
+          </a:p>
+        </p:txBody>
+      </p:sp>
+      <p:sp>
+        <p:nvSpPr>
+          <p:cNvPr id="6" name="Text 6"/>
+          <p:cNvSpPr txBox="1"/>
+          <p:nvPr/>
+        </p:nvSpPr>
+        <p:spPr>
+          <a:xfrm>
+            <a:off x="685800" y="4078605"/>
+            <a:ext cx="904875" cy="476250"/>
+          </a:xfrm>
+          <a:prstGeom prst="rect">
+            <a:avLst/>
+          </a:prstGeom>
+          <a:noFill/>
+          <a:ln>
+            <a:noFill/>
+          </a:ln>
+        </p:spPr>
+        <p:txBody>
+          <a:bodyPr wrap="none" lIns="0" tIns="0" rIns="0" bIns="0" anchor="t">
+            <a:noAutofit/>
+          </a:bodyPr>
+          <a:lstStyle/>
+          <a:p>
+            <a:pPr marL="0" indent="0">
+              <a:lnSpc>
+                <a:spcPts val="2438"/>
+              </a:lnSpc>
+              <a:spcAft>
+                <a:spcPts val="0"/>
+              </a:spcAft>
+              <a:buNone/>
+            </a:pPr>
+            <a:r>
+              <a:rPr lang="en-US" sz="1875" b="0">
+                <a:solidFill>
+                  <a:srgbClr val="EFB45F"/>
+                </a:solidFill>
+                <a:latin typeface="Arial"/>
+                <a:ea typeface="Arial"/>
+                <a:cs typeface="Arial"/>
+              </a:rPr>
+              <a:t xml:space="preserve">02</a:t>
+            </a:r>
+            <a:endParaRPr lang="en-US" sz="1875"/>
+          </a:p>
+        </p:txBody>
+      </p:sp>
+      <p:sp>
+        <p:nvSpPr>
+          <p:cNvPr id="7" name="Text 7"/>
+          <p:cNvSpPr txBox="1"/>
+          <p:nvPr/>
+        </p:nvSpPr>
+        <p:spPr>
+          <a:xfrm>
+            <a:off x="2000250" y="4078605"/>
+            <a:ext cx="11029950" cy="1059180"/>
+          </a:xfrm>
+          <a:prstGeom prst="rect">
+            <a:avLst/>
+          </a:prstGeom>
+          <a:noFill/>
+          <a:ln>
+            <a:noFill/>
+          </a:ln>
+        </p:spPr>
+        <p:txBody>
+          <a:bodyPr wrap="none" lIns="0" tIns="0" rIns="0" bIns="0" anchor="t">
+            <a:noAutofit/>
+          </a:bodyPr>
+          <a:lstStyle/>
+          <a:p>
+            <a:pPr marL="0" indent="0">
+              <a:lnSpc>
+                <a:spcPts val="4095"/>
+              </a:lnSpc>
+              <a:spcAft>
+                <a:spcPts val="0"/>
+              </a:spcAft>
+              <a:buNone/>
+            </a:pPr>
+            <a:r>
+              <a:rPr lang="en-US" sz="3150" b="0">
+                <a:solidFill>
+                  <a:srgbClr val="F5F1E9"/>
+                </a:solidFill>
+                <a:latin typeface="Arial"/>
+                <a:ea typeface="Arial"/>
+                <a:cs typeface="Arial"/>
+              </a:rPr>
+              <a:t xml:space="preserve">Moral hazard · Credible commitment · Asset</a:t>
+            </a:r>
+            <a:endParaRPr lang="en-US" sz="3150"/>
+          </a:p>
+          <a:p>
+            <a:pPr marL="0" indent="0">
+              <a:lnSpc>
+                <a:spcPts val="4095"/>
+              </a:lnSpc>
+              <a:spcAft>
+                <a:spcPts val="0"/>
+              </a:spcAft>
+              <a:buNone/>
+            </a:pPr>
+            <a:r>
+              <a:rPr lang="en-US" sz="3150" b="0">
+                <a:solidFill>
+                  <a:srgbClr val="F5F1E9"/>
+                </a:solidFill>
+                <a:latin typeface="Arial"/>
+                <a:ea typeface="Arial"/>
+                <a:cs typeface="Arial"/>
+              </a:rPr>
+              <a:t xml:space="preserve">specificity · Real option</a:t>
+            </a:r>
+            <a:endParaRPr lang="en-US" sz="3150"/>
+          </a:p>
+        </p:txBody>
+      </p:sp>
+      <p:sp>
+        <p:nvSpPr>
+          <p:cNvPr id="8" name="Text 8"/>
+          <p:cNvSpPr txBox="1"/>
+          <p:nvPr/>
+        </p:nvSpPr>
+        <p:spPr>
+          <a:xfrm>
+            <a:off x="685800" y="5385435"/>
+            <a:ext cx="904875" cy="476250"/>
+          </a:xfrm>
+          <a:prstGeom prst="rect">
+            <a:avLst/>
+          </a:prstGeom>
+          <a:noFill/>
+          <a:ln>
+            <a:noFill/>
+          </a:ln>
+        </p:spPr>
+        <p:txBody>
+          <a:bodyPr wrap="none" lIns="0" tIns="0" rIns="0" bIns="0" anchor="t">
+            <a:noAutofit/>
+          </a:bodyPr>
+          <a:lstStyle/>
+          <a:p>
+            <a:pPr marL="0" indent="0">
+              <a:lnSpc>
+                <a:spcPts val="2438"/>
+              </a:lnSpc>
+              <a:spcAft>
+                <a:spcPts val="0"/>
+              </a:spcAft>
+              <a:buNone/>
+            </a:pPr>
+            <a:r>
+              <a:rPr lang="en-US" sz="1875" b="0">
+                <a:solidFill>
+                  <a:srgbClr val="EFB45F"/>
+                </a:solidFill>
+                <a:latin typeface="Arial"/>
+                <a:ea typeface="Arial"/>
+                <a:cs typeface="Arial"/>
+              </a:rPr>
+              <a:t xml:space="preserve">03</a:t>
+            </a:r>
+            <a:endParaRPr lang="en-US" sz="1875"/>
+          </a:p>
+        </p:txBody>
+      </p:sp>
+      <p:sp>
+        <p:nvSpPr>
+          <p:cNvPr id="9" name="Text 9"/>
+          <p:cNvSpPr txBox="1"/>
+          <p:nvPr/>
+        </p:nvSpPr>
+        <p:spPr>
+          <a:xfrm>
+            <a:off x="2000250" y="5385435"/>
             <a:ext cx="11029950" cy="539115"/>
           </a:xfrm>
           <a:prstGeom prst="rect">
@@ -7804,249 +7426,7 @@
                 <a:ea typeface="Arial"/>
                 <a:cs typeface="Arial"/>
               </a:rPr>
-              <a:t xml:space="preserve">Word six: asset specificity. Word seven: hold-up.</a:t>
-            </a:r>
-            <a:endParaRPr lang="en-US" sz="3150"/>
-          </a:p>
-        </p:txBody>
-      </p:sp>
-      <p:sp>
-        <p:nvSpPr>
-          <p:cNvPr id="6" name="Text 6"/>
-          <p:cNvSpPr txBox="1"/>
-          <p:nvPr/>
-        </p:nvSpPr>
-        <p:spPr>
-          <a:xfrm>
-            <a:off x="685800" y="3558540"/>
-            <a:ext cx="904875" cy="476250"/>
-          </a:xfrm>
-          <a:prstGeom prst="rect">
-            <a:avLst/>
-          </a:prstGeom>
-          <a:noFill/>
-          <a:ln>
-            <a:noFill/>
-          </a:ln>
-        </p:spPr>
-        <p:txBody>
-          <a:bodyPr wrap="none" lIns="0" tIns="0" rIns="0" bIns="0" anchor="t">
-            <a:noAutofit/>
-          </a:bodyPr>
-          <a:lstStyle/>
-          <a:p>
-            <a:pPr marL="0" indent="0">
-              <a:lnSpc>
-                <a:spcPts val="2438"/>
-              </a:lnSpc>
-              <a:spcAft>
-                <a:spcPts val="0"/>
-              </a:spcAft>
-              <a:buNone/>
-            </a:pPr>
-            <a:r>
-              <a:rPr lang="en-US" sz="1875" b="0">
-                <a:solidFill>
-                  <a:srgbClr val="EFB45F"/>
-                </a:solidFill>
-                <a:latin typeface="Arial"/>
-                <a:ea typeface="Arial"/>
-                <a:cs typeface="Arial"/>
-              </a:rPr>
-              <a:t xml:space="preserve">02</a:t>
-            </a:r>
-            <a:endParaRPr lang="en-US" sz="1875"/>
-          </a:p>
-        </p:txBody>
-      </p:sp>
-      <p:sp>
-        <p:nvSpPr>
-          <p:cNvPr id="7" name="Text 7"/>
-          <p:cNvSpPr txBox="1"/>
-          <p:nvPr/>
-        </p:nvSpPr>
-        <p:spPr>
-          <a:xfrm>
-            <a:off x="2000250" y="3558540"/>
-            <a:ext cx="11029950" cy="1059180"/>
-          </a:xfrm>
-          <a:prstGeom prst="rect">
-            <a:avLst/>
-          </a:prstGeom>
-          <a:noFill/>
-          <a:ln>
-            <a:noFill/>
-          </a:ln>
-        </p:spPr>
-        <p:txBody>
-          <a:bodyPr wrap="none" lIns="0" tIns="0" rIns="0" bIns="0" anchor="t">
-            <a:noAutofit/>
-          </a:bodyPr>
-          <a:lstStyle/>
-          <a:p>
-            <a:pPr marL="0" indent="0">
-              <a:lnSpc>
-                <a:spcPts val="4095"/>
-              </a:lnSpc>
-              <a:spcAft>
-                <a:spcPts val="0"/>
-              </a:spcAft>
-              <a:buNone/>
-            </a:pPr>
-            <a:r>
-              <a:rPr lang="en-US" sz="3150" b="0">
-                <a:solidFill>
-                  <a:srgbClr val="F5F1E9"/>
-                </a:solidFill>
-                <a:latin typeface="Arial"/>
-                <a:ea typeface="Arial"/>
-                <a:cs typeface="Arial"/>
-              </a:rPr>
-              <a:t xml:space="preserve">An investment worth a lot inside this relationship</a:t>
-            </a:r>
-            <a:endParaRPr lang="en-US" sz="3150"/>
-          </a:p>
-          <a:p>
-            <a:pPr marL="0" indent="0">
-              <a:lnSpc>
-                <a:spcPts val="4095"/>
-              </a:lnSpc>
-              <a:spcAft>
-                <a:spcPts val="0"/>
-              </a:spcAft>
-              <a:buNone/>
-            </a:pPr>
-            <a:r>
-              <a:rPr lang="en-US" sz="3150" b="0">
-                <a:solidFill>
-                  <a:srgbClr val="F5F1E9"/>
-                </a:solidFill>
-                <a:latin typeface="Arial"/>
-                <a:ea typeface="Arial"/>
-                <a:cs typeface="Arial"/>
-              </a:rPr>
-              <a:t xml:space="preserve">and little outside it</a:t>
-            </a:r>
-            <a:endParaRPr lang="en-US" sz="3150"/>
-          </a:p>
-        </p:txBody>
-      </p:sp>
-      <p:sp>
-        <p:nvSpPr>
-          <p:cNvPr id="8" name="Text 8"/>
-          <p:cNvSpPr txBox="1"/>
-          <p:nvPr/>
-        </p:nvSpPr>
-        <p:spPr>
-          <a:xfrm>
-            <a:off x="685800" y="4865370"/>
-            <a:ext cx="904875" cy="476250"/>
-          </a:xfrm>
-          <a:prstGeom prst="rect">
-            <a:avLst/>
-          </a:prstGeom>
-          <a:noFill/>
-          <a:ln>
-            <a:noFill/>
-          </a:ln>
-        </p:spPr>
-        <p:txBody>
-          <a:bodyPr wrap="none" lIns="0" tIns="0" rIns="0" bIns="0" anchor="t">
-            <a:noAutofit/>
-          </a:bodyPr>
-          <a:lstStyle/>
-          <a:p>
-            <a:pPr marL="0" indent="0">
-              <a:lnSpc>
-                <a:spcPts val="2438"/>
-              </a:lnSpc>
-              <a:spcAft>
-                <a:spcPts val="0"/>
-              </a:spcAft>
-              <a:buNone/>
-            </a:pPr>
-            <a:r>
-              <a:rPr lang="en-US" sz="1875" b="0">
-                <a:solidFill>
-                  <a:srgbClr val="EFB45F"/>
-                </a:solidFill>
-                <a:latin typeface="Arial"/>
-                <a:ea typeface="Arial"/>
-                <a:cs typeface="Arial"/>
-              </a:rPr>
-              <a:t xml:space="preserve">03</a:t>
-            </a:r>
-            <a:endParaRPr lang="en-US" sz="1875"/>
-          </a:p>
-        </p:txBody>
-      </p:sp>
-      <p:sp>
-        <p:nvSpPr>
-          <p:cNvPr id="9" name="Text 9"/>
-          <p:cNvSpPr txBox="1"/>
-          <p:nvPr/>
-        </p:nvSpPr>
-        <p:spPr>
-          <a:xfrm>
-            <a:off x="2000250" y="4865370"/>
-            <a:ext cx="11029950" cy="1059180"/>
-          </a:xfrm>
-          <a:prstGeom prst="rect">
-            <a:avLst/>
-          </a:prstGeom>
-          <a:noFill/>
-          <a:ln>
-            <a:noFill/>
-          </a:ln>
-        </p:spPr>
-        <p:txBody>
-          <a:bodyPr wrap="none" lIns="0" tIns="0" rIns="0" bIns="0" anchor="t">
-            <a:noAutofit/>
-          </a:bodyPr>
-          <a:lstStyle/>
-          <a:p>
-            <a:pPr marL="0" indent="0">
-              <a:lnSpc>
-                <a:spcPts val="4095"/>
-              </a:lnSpc>
-              <a:spcAft>
-                <a:spcPts val="0"/>
-              </a:spcAft>
-              <a:buNone/>
-            </a:pPr>
-            <a:r>
-              <a:rPr lang="en-US" sz="3150" b="0">
-                <a:solidFill>
-                  <a:srgbClr val="F5F1E9"/>
-                </a:solidFill>
-                <a:latin typeface="Arial"/>
-                <a:ea typeface="Arial"/>
-                <a:cs typeface="Arial"/>
-              </a:rPr>
-              <a:t xml:space="preserve">Your prompts, evals, fine-tunes, and that</a:t>
-            </a:r>
-            <a:endParaRPr lang="en-US" sz="3150"/>
-          </a:p>
-          <a:p>
-            <a:pPr marL="0" indent="0">
-              <a:lnSpc>
-                <a:spcPts val="4095"/>
-              </a:lnSpc>
-              <a:spcAft>
-                <a:spcPts val="0"/>
-              </a:spcAft>
-              <a:buNone/>
-            </a:pPr>
-            <a:r>
-              <a:rPr lang="en-US" sz="3150" b="0">
-                <a:solidFill>
-                  <a:srgbClr val="F5F1E9"/>
-                </a:solidFill>
-                <a:latin typeface="Arial"/>
-                <a:ea typeface="Arial"/>
-                <a:cs typeface="Arial"/>
-              </a:rPr>
-              <a:t xml:space="preserve">unlimited-usage clause</a:t>
+              <a:t xml:space="preserve">Build for more than one price.</a:t>
             </a:r>
             <a:endParaRPr lang="en-US" sz="3150"/>
           </a:p>
@@ -8145,575 +7525,6 @@
                 <a:cs typeface="Arial"/>
               </a:rPr>
               <a:t xml:space="preserve">7</a:t>
-            </a:r>
-            <a:endParaRPr lang="en-US" sz="975"/>
-          </a:p>
-        </p:txBody>
-      </p:sp>
-    </p:spTree>
-  </p:cSld>
-  <p:clrMapOvr>
-    <a:masterClrMapping/>
-  </p:clrMapOvr>
-</p:sld>
-</file>
-
-<file path=ppt/slides/slide8.xml><?xml version="1.0" encoding="utf-8"?>
-<p:sld xmlns:a="http://schemas.openxmlformats.org/drawingml/2006/main" xmlns:r="http://schemas.openxmlformats.org/officeDocument/2006/relationships" xmlns:p="http://schemas.openxmlformats.org/presentationml/2006/main">
-  <p:cSld name="Slide 8">
-    <p:bg>
-      <p:bgPr>
-        <a:solidFill>
-          <a:srgbClr val="161D26"/>
-        </a:solidFill>
-        <a:effectLst/>
-      </p:bgPr>
-    </p:bg>
-    <p:spTree>
-      <p:nvGrpSpPr>
-        <p:cNvPr id="1" name=""/>
-        <p:cNvGrpSpPr/>
-        <p:nvPr/>
-      </p:nvGrpSpPr>
-      <p:grpSpPr>
-        <a:xfrm>
-          <a:off x="0" y="0"/>
-          <a:ext cx="0" cy="0"/>
-          <a:chOff x="0" y="0"/>
-          <a:chExt cx="0" cy="0"/>
-        </a:xfrm>
-      </p:grpSpPr>
-      <p:sp>
-        <p:nvSpPr>
-          <p:cNvPr id="2" name="Text 2"/>
-          <p:cNvSpPr txBox="1"/>
-          <p:nvPr/>
-        </p:nvSpPr>
-        <p:spPr>
-          <a:xfrm>
-            <a:off x="685800" y="381000"/>
-            <a:ext cx="12344400" cy="457200"/>
-          </a:xfrm>
-          <a:prstGeom prst="rect">
-            <a:avLst/>
-          </a:prstGeom>
-          <a:noFill/>
-          <a:ln>
-            <a:noFill/>
-          </a:ln>
-        </p:spPr>
-        <p:txBody>
-          <a:bodyPr wrap="none" lIns="0" tIns="0" rIns="0" bIns="0" anchor="t">
-            <a:noAutofit/>
-          </a:bodyPr>
-          <a:lstStyle/>
-          <a:p>
-            <a:pPr marL="0" indent="0">
-              <a:lnSpc>
-                <a:spcPts val="1755"/>
-              </a:lnSpc>
-              <a:spcAft>
-                <a:spcPts val="0"/>
-              </a:spcAft>
-              <a:buNone/>
-            </a:pPr>
-            <a:r>
-              <a:rPr lang="en-US" sz="1350" b="1">
-                <a:solidFill>
-                  <a:srgbClr val="EFB45F"/>
-                </a:solidFill>
-                <a:latin typeface="Arial"/>
-                <a:ea typeface="Arial"/>
-                <a:cs typeface="Arial"/>
-              </a:rPr>
-              <a:t xml:space="preserve">08 / 08    SOURCE SLIDE 15</a:t>
-            </a:r>
-            <a:endParaRPr lang="en-US" sz="1350"/>
-          </a:p>
-        </p:txBody>
-      </p:sp>
-      <p:sp>
-        <p:nvSpPr>
-          <p:cNvPr id="3" name="Text 3"/>
-          <p:cNvSpPr txBox="1"/>
-          <p:nvPr/>
-        </p:nvSpPr>
-        <p:spPr>
-          <a:xfrm>
-            <a:off x="685800" y="1057275"/>
-            <a:ext cx="12344400" cy="1381125"/>
-          </a:xfrm>
-          <a:prstGeom prst="rect">
-            <a:avLst/>
-          </a:prstGeom>
-          <a:noFill/>
-          <a:ln>
-            <a:noFill/>
-          </a:ln>
-        </p:spPr>
-        <p:txBody>
-          <a:bodyPr wrap="none" lIns="0" tIns="0" rIns="0" bIns="0" anchor="t">
-            <a:noAutofit/>
-          </a:bodyPr>
-          <a:lstStyle/>
-          <a:p>
-            <a:pPr marL="0" indent="0">
-              <a:lnSpc>
-                <a:spcPts val="4680"/>
-              </a:lnSpc>
-              <a:spcAft>
-                <a:spcPts val="0"/>
-              </a:spcAft>
-              <a:buNone/>
-            </a:pPr>
-            <a:r>
-              <a:rPr lang="en-US" sz="3900" b="1">
-                <a:solidFill>
-                  <a:srgbClr val="F5F1E9"/>
-                </a:solidFill>
-                <a:latin typeface="Arial"/>
-                <a:ea typeface="Arial"/>
-                <a:cs typeface="Arial"/>
-              </a:rPr>
-              <a:t xml:space="preserve">Cheap intelligence changes incentives first</a:t>
-            </a:r>
-            <a:endParaRPr lang="en-US" sz="3900"/>
-          </a:p>
-        </p:txBody>
-      </p:sp>
-      <p:sp>
-        <p:nvSpPr>
-          <p:cNvPr id="4" name="Text 4"/>
-          <p:cNvSpPr txBox="1"/>
-          <p:nvPr/>
-        </p:nvSpPr>
-        <p:spPr>
-          <a:xfrm>
-            <a:off x="685800" y="2771775"/>
-            <a:ext cx="904875" cy="476250"/>
-          </a:xfrm>
-          <a:prstGeom prst="rect">
-            <a:avLst/>
-          </a:prstGeom>
-          <a:noFill/>
-          <a:ln>
-            <a:noFill/>
-          </a:ln>
-        </p:spPr>
-        <p:txBody>
-          <a:bodyPr wrap="none" lIns="0" tIns="0" rIns="0" bIns="0" anchor="t">
-            <a:noAutofit/>
-          </a:bodyPr>
-          <a:lstStyle/>
-          <a:p>
-            <a:pPr marL="0" indent="0">
-              <a:lnSpc>
-                <a:spcPts val="2438"/>
-              </a:lnSpc>
-              <a:spcAft>
-                <a:spcPts val="0"/>
-              </a:spcAft>
-              <a:buNone/>
-            </a:pPr>
-            <a:r>
-              <a:rPr lang="en-US" sz="1875" b="0">
-                <a:solidFill>
-                  <a:srgbClr val="EFB45F"/>
-                </a:solidFill>
-                <a:latin typeface="Arial"/>
-                <a:ea typeface="Arial"/>
-                <a:cs typeface="Arial"/>
-              </a:rPr>
-              <a:t xml:space="preserve">01</a:t>
-            </a:r>
-            <a:endParaRPr lang="en-US" sz="1875"/>
-          </a:p>
-        </p:txBody>
-      </p:sp>
-      <p:sp>
-        <p:nvSpPr>
-          <p:cNvPr id="5" name="Text 5"/>
-          <p:cNvSpPr txBox="1"/>
-          <p:nvPr/>
-        </p:nvSpPr>
-        <p:spPr>
-          <a:xfrm>
-            <a:off x="2000250" y="2771775"/>
-            <a:ext cx="11029950" cy="1059180"/>
-          </a:xfrm>
-          <a:prstGeom prst="rect">
-            <a:avLst/>
-          </a:prstGeom>
-          <a:noFill/>
-          <a:ln>
-            <a:noFill/>
-          </a:ln>
-        </p:spPr>
-        <p:txBody>
-          <a:bodyPr wrap="none" lIns="0" tIns="0" rIns="0" bIns="0" anchor="t">
-            <a:noAutofit/>
-          </a:bodyPr>
-          <a:lstStyle/>
-          <a:p>
-            <a:pPr marL="0" indent="0">
-              <a:lnSpc>
-                <a:spcPts val="4095"/>
-              </a:lnSpc>
-              <a:spcAft>
-                <a:spcPts val="0"/>
-              </a:spcAft>
-              <a:buNone/>
-            </a:pPr>
-            <a:r>
-              <a:rPr lang="en-US" sz="3150" b="0">
-                <a:solidFill>
-                  <a:srgbClr val="F5F1E9"/>
-                </a:solidFill>
-                <a:latin typeface="Arial"/>
-                <a:ea typeface="Arial"/>
-                <a:cs typeface="Arial"/>
-              </a:rPr>
-              <a:t xml:space="preserve">Externality · Induced demand · Jevons paradox · Path</a:t>
-            </a:r>
-            <a:endParaRPr lang="en-US" sz="3150"/>
-          </a:p>
-          <a:p>
-            <a:pPr marL="0" indent="0">
-              <a:lnSpc>
-                <a:spcPts val="4095"/>
-              </a:lnSpc>
-              <a:spcAft>
-                <a:spcPts val="0"/>
-              </a:spcAft>
-              <a:buNone/>
-            </a:pPr>
-            <a:r>
-              <a:rPr lang="en-US" sz="3150" b="0">
-                <a:solidFill>
-                  <a:srgbClr val="F5F1E9"/>
-                </a:solidFill>
-                <a:latin typeface="Arial"/>
-                <a:ea typeface="Arial"/>
-                <a:cs typeface="Arial"/>
-              </a:rPr>
-              <a:t xml:space="preserve">dependence</a:t>
-            </a:r>
-            <a:endParaRPr lang="en-US" sz="3150"/>
-          </a:p>
-        </p:txBody>
-      </p:sp>
-      <p:sp>
-        <p:nvSpPr>
-          <p:cNvPr id="6" name="Text 6"/>
-          <p:cNvSpPr txBox="1"/>
-          <p:nvPr/>
-        </p:nvSpPr>
-        <p:spPr>
-          <a:xfrm>
-            <a:off x="685800" y="4078605"/>
-            <a:ext cx="904875" cy="476250"/>
-          </a:xfrm>
-          <a:prstGeom prst="rect">
-            <a:avLst/>
-          </a:prstGeom>
-          <a:noFill/>
-          <a:ln>
-            <a:noFill/>
-          </a:ln>
-        </p:spPr>
-        <p:txBody>
-          <a:bodyPr wrap="none" lIns="0" tIns="0" rIns="0" bIns="0" anchor="t">
-            <a:noAutofit/>
-          </a:bodyPr>
-          <a:lstStyle/>
-          <a:p>
-            <a:pPr marL="0" indent="0">
-              <a:lnSpc>
-                <a:spcPts val="2438"/>
-              </a:lnSpc>
-              <a:spcAft>
-                <a:spcPts val="0"/>
-              </a:spcAft>
-              <a:buNone/>
-            </a:pPr>
-            <a:r>
-              <a:rPr lang="en-US" sz="1875" b="0">
-                <a:solidFill>
-                  <a:srgbClr val="EFB45F"/>
-                </a:solidFill>
-                <a:latin typeface="Arial"/>
-                <a:ea typeface="Arial"/>
-                <a:cs typeface="Arial"/>
-              </a:rPr>
-              <a:t xml:space="preserve">02</a:t>
-            </a:r>
-            <a:endParaRPr lang="en-US" sz="1875"/>
-          </a:p>
-        </p:txBody>
-      </p:sp>
-      <p:sp>
-        <p:nvSpPr>
-          <p:cNvPr id="7" name="Text 7"/>
-          <p:cNvSpPr txBox="1"/>
-          <p:nvPr/>
-        </p:nvSpPr>
-        <p:spPr>
-          <a:xfrm>
-            <a:off x="2000250" y="4078605"/>
-            <a:ext cx="11029950" cy="1059180"/>
-          </a:xfrm>
-          <a:prstGeom prst="rect">
-            <a:avLst/>
-          </a:prstGeom>
-          <a:noFill/>
-          <a:ln>
-            <a:noFill/>
-          </a:ln>
-        </p:spPr>
-        <p:txBody>
-          <a:bodyPr wrap="none" lIns="0" tIns="0" rIns="0" bIns="0" anchor="t">
-            <a:noAutofit/>
-          </a:bodyPr>
-          <a:lstStyle/>
-          <a:p>
-            <a:pPr marL="0" indent="0">
-              <a:lnSpc>
-                <a:spcPts val="4095"/>
-              </a:lnSpc>
-              <a:spcAft>
-                <a:spcPts val="0"/>
-              </a:spcAft>
-              <a:buNone/>
-            </a:pPr>
-            <a:r>
-              <a:rPr lang="en-US" sz="3150" b="0">
-                <a:solidFill>
-                  <a:srgbClr val="F5F1E9"/>
-                </a:solidFill>
-                <a:latin typeface="Arial"/>
-                <a:ea typeface="Arial"/>
-                <a:cs typeface="Arial"/>
-              </a:rPr>
-              <a:t xml:space="preserve">Moral hazard · Credible commitment · Asset</a:t>
-            </a:r>
-            <a:endParaRPr lang="en-US" sz="3150"/>
-          </a:p>
-          <a:p>
-            <a:pPr marL="0" indent="0">
-              <a:lnSpc>
-                <a:spcPts val="4095"/>
-              </a:lnSpc>
-              <a:spcAft>
-                <a:spcPts val="0"/>
-              </a:spcAft>
-              <a:buNone/>
-            </a:pPr>
-            <a:r>
-              <a:rPr lang="en-US" sz="3150" b="0">
-                <a:solidFill>
-                  <a:srgbClr val="F5F1E9"/>
-                </a:solidFill>
-                <a:latin typeface="Arial"/>
-                <a:ea typeface="Arial"/>
-                <a:cs typeface="Arial"/>
-              </a:rPr>
-              <a:t xml:space="preserve">specificity · Real option</a:t>
-            </a:r>
-            <a:endParaRPr lang="en-US" sz="3150"/>
-          </a:p>
-        </p:txBody>
-      </p:sp>
-      <p:sp>
-        <p:nvSpPr>
-          <p:cNvPr id="8" name="Text 8"/>
-          <p:cNvSpPr txBox="1"/>
-          <p:nvPr/>
-        </p:nvSpPr>
-        <p:spPr>
-          <a:xfrm>
-            <a:off x="685800" y="5385435"/>
-            <a:ext cx="904875" cy="476250"/>
-          </a:xfrm>
-          <a:prstGeom prst="rect">
-            <a:avLst/>
-          </a:prstGeom>
-          <a:noFill/>
-          <a:ln>
-            <a:noFill/>
-          </a:ln>
-        </p:spPr>
-        <p:txBody>
-          <a:bodyPr wrap="none" lIns="0" tIns="0" rIns="0" bIns="0" anchor="t">
-            <a:noAutofit/>
-          </a:bodyPr>
-          <a:lstStyle/>
-          <a:p>
-            <a:pPr marL="0" indent="0">
-              <a:lnSpc>
-                <a:spcPts val="2438"/>
-              </a:lnSpc>
-              <a:spcAft>
-                <a:spcPts val="0"/>
-              </a:spcAft>
-              <a:buNone/>
-            </a:pPr>
-            <a:r>
-              <a:rPr lang="en-US" sz="1875" b="0">
-                <a:solidFill>
-                  <a:srgbClr val="EFB45F"/>
-                </a:solidFill>
-                <a:latin typeface="Arial"/>
-                <a:ea typeface="Arial"/>
-                <a:cs typeface="Arial"/>
-              </a:rPr>
-              <a:t xml:space="preserve">03</a:t>
-            </a:r>
-            <a:endParaRPr lang="en-US" sz="1875"/>
-          </a:p>
-        </p:txBody>
-      </p:sp>
-      <p:sp>
-        <p:nvSpPr>
-          <p:cNvPr id="9" name="Text 9"/>
-          <p:cNvSpPr txBox="1"/>
-          <p:nvPr/>
-        </p:nvSpPr>
-        <p:spPr>
-          <a:xfrm>
-            <a:off x="2000250" y="5385435"/>
-            <a:ext cx="11029950" cy="539115"/>
-          </a:xfrm>
-          <a:prstGeom prst="rect">
-            <a:avLst/>
-          </a:prstGeom>
-          <a:noFill/>
-          <a:ln>
-            <a:noFill/>
-          </a:ln>
-        </p:spPr>
-        <p:txBody>
-          <a:bodyPr wrap="none" lIns="0" tIns="0" rIns="0" bIns="0" anchor="t">
-            <a:noAutofit/>
-          </a:bodyPr>
-          <a:lstStyle/>
-          <a:p>
-            <a:pPr marL="0" indent="0">
-              <a:lnSpc>
-                <a:spcPts val="4095"/>
-              </a:lnSpc>
-              <a:spcAft>
-                <a:spcPts val="0"/>
-              </a:spcAft>
-              <a:buNone/>
-            </a:pPr>
-            <a:r>
-              <a:rPr lang="en-US" sz="3150" b="0">
-                <a:solidFill>
-                  <a:srgbClr val="F5F1E9"/>
-                </a:solidFill>
-                <a:latin typeface="Arial"/>
-                <a:ea typeface="Arial"/>
-                <a:cs typeface="Arial"/>
-              </a:rPr>
-              <a:t xml:space="preserve">Build for more than one price.</a:t>
-            </a:r>
-            <a:endParaRPr lang="en-US" sz="3150"/>
-          </a:p>
-        </p:txBody>
-      </p:sp>
-      <p:sp>
-        <p:nvSpPr>
-          <p:cNvPr id="10" name="Text 10"/>
-          <p:cNvSpPr txBox="1"/>
-          <p:nvPr/>
-        </p:nvSpPr>
-        <p:spPr>
-          <a:xfrm>
-            <a:off x="457200" y="8286750"/>
-            <a:ext cx="12477750" cy="190500"/>
-          </a:xfrm>
-          <a:prstGeom prst="rect">
-            <a:avLst/>
-          </a:prstGeom>
-          <a:noFill/>
-          <a:ln>
-            <a:noFill/>
-          </a:ln>
-        </p:spPr>
-        <p:txBody>
-          <a:bodyPr wrap="none" lIns="0" tIns="0" rIns="0" bIns="0" anchor="t">
-            <a:noAutofit/>
-          </a:bodyPr>
-          <a:lstStyle/>
-          <a:p>
-            <a:pPr marL="0" indent="0">
-              <a:lnSpc>
-                <a:spcPts val="1268"/>
-              </a:lnSpc>
-              <a:spcAft>
-                <a:spcPts val="0"/>
-              </a:spcAft>
-              <a:buNone/>
-            </a:pPr>
-            <a:r>
-              <a:rPr lang="en-US" sz="975" b="0">
-                <a:solidFill>
-                  <a:srgbClr val="BEC9C6"/>
-                </a:solidFill>
-                <a:latin typeface="Arial"/>
-                <a:ea typeface="Arial"/>
-                <a:cs typeface="Arial"/>
-              </a:rPr>
-              <a:t xml:space="preserve">Buy Me a Free Tier</a:t>
-            </a:r>
-            <a:endParaRPr lang="en-US" sz="975"/>
-          </a:p>
-        </p:txBody>
-      </p:sp>
-      <p:sp>
-        <p:nvSpPr>
-          <p:cNvPr id="11" name="Text 11"/>
-          <p:cNvSpPr txBox="1"/>
-          <p:nvPr/>
-        </p:nvSpPr>
-        <p:spPr>
-          <a:xfrm>
-            <a:off x="13049250" y="8286750"/>
-            <a:ext cx="238125" cy="190500"/>
-          </a:xfrm>
-          <a:prstGeom prst="rect">
-            <a:avLst/>
-          </a:prstGeom>
-          <a:noFill/>
-          <a:ln>
-            <a:noFill/>
-          </a:ln>
-        </p:spPr>
-        <p:txBody>
-          <a:bodyPr wrap="none" lIns="0" tIns="0" rIns="0" bIns="0" anchor="t">
-            <a:noAutofit/>
-          </a:bodyPr>
-          <a:lstStyle/>
-          <a:p>
-            <a:pPr marL="0" indent="0">
-              <a:lnSpc>
-                <a:spcPts val="1268"/>
-              </a:lnSpc>
-              <a:spcAft>
-                <a:spcPts val="0"/>
-              </a:spcAft>
-              <a:buNone/>
-            </a:pPr>
-            <a:r>
-              <a:rPr lang="en-US" sz="975" b="0">
-                <a:solidFill>
-                  <a:srgbClr val="BEC9C6"/>
-                </a:solidFill>
-                <a:latin typeface="Arial"/>
-                <a:ea typeface="Arial"/>
-                <a:cs typeface="Arial"/>
-              </a:rPr>
-              <a:t xml:space="preserve">8</a:t>
             </a:r>
             <a:endParaRPr lang="en-US" sz="975"/>
           </a:p>
